--- a/reference.pptx
+++ b/reference.pptx
@@ -231,7 +231,7 @@
           <a:p>
             <a:fld id="{DD925C12-D9C3-4748-B45F-0C5A2B3C54BA}" type="datetimeFigureOut">
               <a:rPr lang="he-IL" smtClean="0"/>
-              <a:t>י"ג.שבט.תשפ"ו</a:t>
+              <a:t>כ"א.שבט.תשפ"ו</a:t>
             </a:fld>
             <a:endParaRPr lang="he-IL"/>
           </a:p>
@@ -408,7 +408,7 @@
           <a:p>
             <a:fld id="{CAD1E319-67F0-2846-8742-18CC0BED76BD}" type="datetimeFigureOut">
               <a:rPr lang="he-IL" smtClean="0"/>
-              <a:t>י"ג.שבט.תשפ"ו</a:t>
+              <a:t>כ"א.שבט.תשפ"ו</a:t>
             </a:fld>
             <a:endParaRPr lang="he-IL"/>
           </a:p>
@@ -858,7 +858,7 @@
           <a:p>
             <a:fld id="{A3964B5F-BAD9-9946-9D71-AB5C763DA70C}" type="datetime9">
               <a:rPr lang="he-IL" smtClean="0"/>
-              <a:t>31 ינואר, 2026</a:t>
+              <a:t>8 פברואר, 2026</a:t>
             </a:fld>
             <a:endParaRPr lang="en-US"/>
           </a:p>
@@ -1029,7 +1029,7 @@
           <a:p>
             <a:fld id="{6A744ED6-1944-D14D-91B5-FC6036DE393D}" type="datetime9">
               <a:rPr lang="he-IL" smtClean="0"/>
-              <a:t>31 ינואר, 2026</a:t>
+              <a:t>8 פברואר, 2026</a:t>
             </a:fld>
             <a:endParaRPr lang="en-US"/>
           </a:p>
@@ -1210,7 +1210,7 @@
           <a:p>
             <a:fld id="{37268E4D-FFEC-474C-BD1C-299FD021CBA4}" type="datetime9">
               <a:rPr lang="he-IL" smtClean="0"/>
-              <a:t>31 ינואר, 2026</a:t>
+              <a:t>8 פברואר, 2026</a:t>
             </a:fld>
             <a:endParaRPr lang="en-US"/>
           </a:p>
@@ -1403,7 +1403,7 @@
           <a:p>
             <a:fld id="{29E1EEA0-9609-584F-90F2-46E4F93E52CD}" type="datetime9">
               <a:rPr lang="he-IL" smtClean="0"/>
-              <a:t>31 ינואר, 2026</a:t>
+              <a:t>8 פברואר, 2026</a:t>
             </a:fld>
             <a:endParaRPr lang="en-US"/>
           </a:p>
@@ -1501,7 +1501,7 @@
           <a:p>
             <a:fld id="{BDCA6A5E-CA21-6B4F-9DE7-1A275F321E49}" type="datetime9">
               <a:rPr lang="he-IL" smtClean="0"/>
-              <a:t>31 ינואר, 2026</a:t>
+              <a:t>8 פברואר, 2026</a:t>
             </a:fld>
             <a:endParaRPr lang="en-US"/>
           </a:p>
@@ -1653,8 +1653,8 @@
         </p:nvSpPr>
         <p:spPr>
           <a:xfrm>
-            <a:off x="609600" y="1600201"/>
-            <a:ext cx="5384800" cy="4525963"/>
+            <a:off x="956840" y="1600201"/>
+            <a:ext cx="6601428" cy="4525963"/>
           </a:xfrm>
         </p:spPr>
         <p:txBody>
@@ -1691,35 +1691,35 @@
           <a:p>
             <a:pPr lvl="0"/>
             <a:r>
-              <a:rPr lang="en-US"/>
+              <a:rPr lang="en-US" dirty="0"/>
               <a:t>Click to edit Master text styles</a:t>
             </a:r>
           </a:p>
           <a:p>
             <a:pPr lvl="1"/>
             <a:r>
-              <a:rPr lang="en-US"/>
+              <a:rPr lang="en-US" dirty="0"/>
               <a:t>Second level</a:t>
             </a:r>
           </a:p>
           <a:p>
             <a:pPr lvl="2"/>
             <a:r>
-              <a:rPr lang="en-US"/>
+              <a:rPr lang="en-US" dirty="0"/>
               <a:t>Third level</a:t>
             </a:r>
           </a:p>
           <a:p>
             <a:pPr lvl="3"/>
             <a:r>
-              <a:rPr lang="en-US"/>
+              <a:rPr lang="en-US" dirty="0"/>
               <a:t>Fourth level</a:t>
             </a:r>
           </a:p>
           <a:p>
             <a:pPr lvl="4"/>
             <a:r>
-              <a:rPr lang="en-US"/>
+              <a:rPr lang="en-US" dirty="0"/>
               <a:t>Fifth level</a:t>
             </a:r>
           </a:p>
@@ -1737,8 +1737,8 @@
         </p:nvSpPr>
         <p:spPr>
           <a:xfrm>
-            <a:off x="6197600" y="1600201"/>
-            <a:ext cx="5384800" cy="4525963"/>
+            <a:off x="5717894" y="2569580"/>
+            <a:ext cx="5864506" cy="3556584"/>
           </a:xfrm>
         </p:spPr>
         <p:txBody>
@@ -1775,35 +1775,35 @@
           <a:p>
             <a:pPr lvl="0"/>
             <a:r>
-              <a:rPr lang="en-US"/>
+              <a:rPr lang="en-US" dirty="0"/>
               <a:t>Click to edit Master text styles</a:t>
             </a:r>
           </a:p>
           <a:p>
             <a:pPr lvl="1"/>
             <a:r>
-              <a:rPr lang="en-US"/>
+              <a:rPr lang="en-US" dirty="0"/>
               <a:t>Second level</a:t>
             </a:r>
           </a:p>
           <a:p>
             <a:pPr lvl="2"/>
             <a:r>
-              <a:rPr lang="en-US"/>
+              <a:rPr lang="en-US" dirty="0"/>
               <a:t>Third level</a:t>
             </a:r>
           </a:p>
           <a:p>
             <a:pPr lvl="3"/>
             <a:r>
-              <a:rPr lang="en-US"/>
+              <a:rPr lang="en-US" dirty="0"/>
               <a:t>Fourth level</a:t>
             </a:r>
           </a:p>
           <a:p>
             <a:pPr lvl="4"/>
             <a:r>
-              <a:rPr lang="en-US"/>
+              <a:rPr lang="en-US" dirty="0"/>
               <a:t>Fifth level</a:t>
             </a:r>
           </a:p>
@@ -1826,7 +1826,7 @@
           <a:p>
             <a:fld id="{AE3C6960-90E0-EA41-937B-E68D4C6A0841}" type="datetime9">
               <a:rPr lang="he-IL" smtClean="0"/>
-              <a:t>31 ינואר, 2026</a:t>
+              <a:t>8 פברואר, 2026</a:t>
             </a:fld>
             <a:endParaRPr lang="en-US"/>
           </a:p>
@@ -2248,7 +2248,7 @@
           <a:p>
             <a:fld id="{38CAE1C8-A9FA-924F-80DA-3B96C0343AF4}" type="datetime9">
               <a:rPr lang="he-IL" smtClean="0"/>
-              <a:t>31 ינואר, 2026</a:t>
+              <a:t>8 פברואר, 2026</a:t>
             </a:fld>
             <a:endParaRPr lang="en-US"/>
           </a:p>
@@ -2368,7 +2368,7 @@
           <a:p>
             <a:fld id="{3DC92AE4-510D-3C40-B9B0-AA6693EED883}" type="datetime9">
               <a:rPr lang="he-IL" smtClean="0"/>
-              <a:t>31 ינואר, 2026</a:t>
+              <a:t>8 פברואר, 2026</a:t>
             </a:fld>
             <a:endParaRPr lang="en-US"/>
           </a:p>
@@ -2466,7 +2466,7 @@
           <a:p>
             <a:fld id="{E2C5D179-4B48-7641-AFA1-4656153FFCB8}" type="datetime9">
               <a:rPr lang="he-IL" smtClean="0"/>
-              <a:t>31 ינואר, 2026</a:t>
+              <a:t>8 פברואר, 2026</a:t>
             </a:fld>
             <a:endParaRPr lang="en-US"/>
           </a:p>
@@ -2549,50 +2549,147 @@
       </p:grpSpPr>
       <p:sp>
         <p:nvSpPr>
-          <p:cNvPr id="3" name="Content Placeholder 2"/>
-          <p:cNvSpPr>
-            <a:spLocks noGrp="1"/>
-          </p:cNvSpPr>
-          <p:nvPr>
-            <p:ph idx="1"/>
+          <p:cNvPr id="5" name="Date Placeholder 4"/>
+          <p:cNvSpPr>
+            <a:spLocks noGrp="1"/>
+          </p:cNvSpPr>
+          <p:nvPr>
+            <p:ph type="dt" sz="half" idx="10"/>
+          </p:nvPr>
+        </p:nvSpPr>
+        <p:spPr/>
+        <p:txBody>
+          <a:bodyPr/>
+          <a:lstStyle/>
+          <a:p>
+            <a:fld id="{B2D96A8D-C7E4-194A-BF0A-D552B24EBF94}" type="datetime9">
+              <a:rPr lang="he-IL" smtClean="0"/>
+              <a:t>8 פברואר, 2026</a:t>
+            </a:fld>
+            <a:endParaRPr lang="en-US"/>
+          </a:p>
+        </p:txBody>
+      </p:sp>
+      <p:sp>
+        <p:nvSpPr>
+          <p:cNvPr id="6" name="Footer Placeholder 5"/>
+          <p:cNvSpPr>
+            <a:spLocks noGrp="1"/>
+          </p:cNvSpPr>
+          <p:nvPr>
+            <p:ph type="ftr" sz="quarter" idx="11"/>
+          </p:nvPr>
+        </p:nvSpPr>
+        <p:spPr/>
+        <p:txBody>
+          <a:bodyPr/>
+          <a:lstStyle/>
+          <a:p>
+            <a:r>
+              <a:rPr lang="en-US"/>
+              <a:t>Or Peretz</a:t>
+            </a:r>
+          </a:p>
+        </p:txBody>
+      </p:sp>
+      <p:sp>
+        <p:nvSpPr>
+          <p:cNvPr id="7" name="Slide Number Placeholder 6"/>
+          <p:cNvSpPr>
+            <a:spLocks noGrp="1"/>
+          </p:cNvSpPr>
+          <p:nvPr>
+            <p:ph type="sldNum" sz="quarter" idx="12"/>
+          </p:nvPr>
+        </p:nvSpPr>
+        <p:spPr/>
+        <p:txBody>
+          <a:bodyPr/>
+          <a:lstStyle/>
+          <a:p>
+            <a:fld id="{C1FF6DA9-008F-8B48-92A6-B652298478BF}" type="slidenum">
+              <a:rPr lang="en-US" smtClean="0"/>
+              <a:t>‹#›</a:t>
+            </a:fld>
+            <a:endParaRPr lang="en-US"/>
+          </a:p>
+        </p:txBody>
+      </p:sp>
+      <p:sp>
+        <p:nvSpPr>
+          <p:cNvPr id="9" name="Title 1">
+            <a:extLst>
+              <a:ext uri="{FF2B5EF4-FFF2-40B4-BE49-F238E27FC236}">
+                <a16:creationId xmlns:a16="http://schemas.microsoft.com/office/drawing/2014/main" id="{7F24627C-5938-5D06-969C-341161F72C9C}"/>
+              </a:ext>
+            </a:extLst>
+          </p:cNvPr>
+          <p:cNvSpPr>
+            <a:spLocks noGrp="1"/>
+          </p:cNvSpPr>
+          <p:nvPr>
+            <p:ph type="title"/>
           </p:nvPr>
         </p:nvSpPr>
         <p:spPr>
           <a:xfrm>
-            <a:off x="5769621" y="1546412"/>
-            <a:ext cx="6338761" cy="4579752"/>
+            <a:off x="609600" y="274638"/>
+            <a:ext cx="10972800" cy="1143000"/>
           </a:xfrm>
         </p:spPr>
         <p:txBody>
           <a:bodyPr/>
+          <a:lstStyle/>
+          <a:p>
+            <a:r>
+              <a:rPr lang="en-US"/>
+              <a:t>Click to edit Master title style</a:t>
+            </a:r>
+          </a:p>
+        </p:txBody>
+      </p:sp>
+      <p:sp>
+        <p:nvSpPr>
+          <p:cNvPr id="2" name="Content Placeholder 2">
+            <a:extLst>
+              <a:ext uri="{FF2B5EF4-FFF2-40B4-BE49-F238E27FC236}">
+                <a16:creationId xmlns:a16="http://schemas.microsoft.com/office/drawing/2014/main" id="{63E56AFE-36F7-8DA5-652B-89A25DA319A7}"/>
+              </a:ext>
+            </a:extLst>
+          </p:cNvPr>
+          <p:cNvSpPr>
+            <a:spLocks noGrp="1"/>
+          </p:cNvSpPr>
+          <p:nvPr>
+            <p:ph idx="1" hasCustomPrompt="1"/>
+          </p:nvPr>
+        </p:nvSpPr>
+        <p:spPr>
+          <a:xfrm>
+            <a:off x="3957403" y="1417638"/>
+            <a:ext cx="7624997" cy="4357028"/>
+          </a:xfrm>
+        </p:spPr>
+        <p:txBody>
+          <a:bodyPr>
+            <a:normAutofit/>
+          </a:bodyPr>
           <a:lstStyle>
             <a:lvl1pPr>
-              <a:defRPr sz="3200"/>
+              <a:defRPr sz="2800"/>
             </a:lvl1pPr>
             <a:lvl2pPr>
-              <a:defRPr sz="2800"/>
+              <a:defRPr sz="2400"/>
             </a:lvl2pPr>
             <a:lvl3pPr>
-              <a:defRPr sz="2400"/>
+              <a:defRPr sz="2000"/>
             </a:lvl3pPr>
             <a:lvl4pPr>
-              <a:defRPr sz="2000"/>
+              <a:defRPr sz="1800"/>
             </a:lvl4pPr>
             <a:lvl5pPr>
-              <a:defRPr sz="2000"/>
+              <a:defRPr sz="1800"/>
             </a:lvl5pPr>
-            <a:lvl6pPr>
-              <a:defRPr sz="2000"/>
-            </a:lvl6pPr>
-            <a:lvl7pPr>
-              <a:defRPr sz="2000"/>
-            </a:lvl7pPr>
-            <a:lvl8pPr>
-              <a:defRPr sz="2000"/>
-            </a:lvl8pPr>
-            <a:lvl9pPr>
-              <a:defRPr sz="2000"/>
-            </a:lvl9pPr>
           </a:lstStyle>
           <a:p>
             <a:pPr lvl="0"/>
@@ -2633,7 +2730,13 @@
       </p:sp>
       <p:sp>
         <p:nvSpPr>
-          <p:cNvPr id="4" name="Text Placeholder 3"/>
+          <p:cNvPr id="3" name="Text Placeholder 3">
+            <a:extLst>
+              <a:ext uri="{FF2B5EF4-FFF2-40B4-BE49-F238E27FC236}">
+                <a16:creationId xmlns:a16="http://schemas.microsoft.com/office/drawing/2014/main" id="{838FFFFD-68E9-C4E4-7764-523BAE32B83B}"/>
+              </a:ext>
+            </a:extLst>
+          </p:cNvPr>
           <p:cNvSpPr>
             <a:spLocks noGrp="1"/>
           </p:cNvSpPr>
@@ -2643,17 +2746,14 @@
         </p:nvSpPr>
         <p:spPr>
           <a:xfrm>
-            <a:off x="609601" y="1546412"/>
-            <a:ext cx="5030548" cy="4579752"/>
+            <a:off x="965200" y="1417638"/>
+            <a:ext cx="2844801" cy="4357028"/>
           </a:xfrm>
         </p:spPr>
         <p:txBody>
           <a:bodyPr/>
           <a:lstStyle>
             <a:lvl1pPr marL="0" indent="0">
-              <a:lnSpc>
-                <a:spcPct val="150000"/>
-              </a:lnSpc>
               <a:buNone/>
               <a:defRPr sz="2200"/>
             </a:lvl1pPr>
@@ -2695,107 +2795,6 @@
             <a:r>
               <a:rPr lang="en-US" dirty="0"/>
               <a:t>Click to edit Master text styles</a:t>
-            </a:r>
-          </a:p>
-        </p:txBody>
-      </p:sp>
-      <p:sp>
-        <p:nvSpPr>
-          <p:cNvPr id="5" name="Date Placeholder 4"/>
-          <p:cNvSpPr>
-            <a:spLocks noGrp="1"/>
-          </p:cNvSpPr>
-          <p:nvPr>
-            <p:ph type="dt" sz="half" idx="10"/>
-          </p:nvPr>
-        </p:nvSpPr>
-        <p:spPr/>
-        <p:txBody>
-          <a:bodyPr/>
-          <a:lstStyle/>
-          <a:p>
-            <a:fld id="{B2D96A8D-C7E4-194A-BF0A-D552B24EBF94}" type="datetime9">
-              <a:rPr lang="he-IL" smtClean="0"/>
-              <a:t>31 ינואר, 2026</a:t>
-            </a:fld>
-            <a:endParaRPr lang="en-US"/>
-          </a:p>
-        </p:txBody>
-      </p:sp>
-      <p:sp>
-        <p:nvSpPr>
-          <p:cNvPr id="6" name="Footer Placeholder 5"/>
-          <p:cNvSpPr>
-            <a:spLocks noGrp="1"/>
-          </p:cNvSpPr>
-          <p:nvPr>
-            <p:ph type="ftr" sz="quarter" idx="11"/>
-          </p:nvPr>
-        </p:nvSpPr>
-        <p:spPr/>
-        <p:txBody>
-          <a:bodyPr/>
-          <a:lstStyle/>
-          <a:p>
-            <a:r>
-              <a:rPr lang="en-US"/>
-              <a:t>Or Peretz</a:t>
-            </a:r>
-          </a:p>
-        </p:txBody>
-      </p:sp>
-      <p:sp>
-        <p:nvSpPr>
-          <p:cNvPr id="7" name="Slide Number Placeholder 6"/>
-          <p:cNvSpPr>
-            <a:spLocks noGrp="1"/>
-          </p:cNvSpPr>
-          <p:nvPr>
-            <p:ph type="sldNum" sz="quarter" idx="12"/>
-          </p:nvPr>
-        </p:nvSpPr>
-        <p:spPr/>
-        <p:txBody>
-          <a:bodyPr/>
-          <a:lstStyle/>
-          <a:p>
-            <a:fld id="{C1FF6DA9-008F-8B48-92A6-B652298478BF}" type="slidenum">
-              <a:rPr lang="en-US" smtClean="0"/>
-              <a:t>‹#›</a:t>
-            </a:fld>
-            <a:endParaRPr lang="en-US"/>
-          </a:p>
-        </p:txBody>
-      </p:sp>
-      <p:sp>
-        <p:nvSpPr>
-          <p:cNvPr id="9" name="Title 1">
-            <a:extLst>
-              <a:ext uri="{FF2B5EF4-FFF2-40B4-BE49-F238E27FC236}">
-                <a16:creationId xmlns:a16="http://schemas.microsoft.com/office/drawing/2014/main" id="{7F24627C-5938-5D06-969C-341161F72C9C}"/>
-              </a:ext>
-            </a:extLst>
-          </p:cNvPr>
-          <p:cNvSpPr>
-            <a:spLocks noGrp="1"/>
-          </p:cNvSpPr>
-          <p:nvPr>
-            <p:ph type="title"/>
-          </p:nvPr>
-        </p:nvSpPr>
-        <p:spPr>
-          <a:xfrm>
-            <a:off x="609600" y="274638"/>
-            <a:ext cx="10972800" cy="1143000"/>
-          </a:xfrm>
-        </p:spPr>
-        <p:txBody>
-          <a:bodyPr/>
-          <a:lstStyle/>
-          <a:p>
-            <a:r>
-              <a:rPr lang="en-US"/>
-              <a:t>Click to edit Master title style</a:t>
             </a:r>
           </a:p>
         </p:txBody>
@@ -3004,7 +3003,7 @@
           <a:p>
             <a:fld id="{A12B2D52-0D9F-F345-8384-0DCA30BF1F04}" type="datetime9">
               <a:rPr lang="he-IL" smtClean="0"/>
-              <a:t>31 ינואר, 2026</a:t>
+              <a:t>8 פברואר, 2026</a:t>
             </a:fld>
             <a:endParaRPr lang="en-US"/>
           </a:p>
@@ -3250,8 +3249,8 @@
         </p:nvSpPr>
         <p:spPr>
           <a:xfrm>
-            <a:off x="609600" y="1600201"/>
-            <a:ext cx="10972800" cy="4525963"/>
+            <a:off x="946768" y="1600201"/>
+            <a:ext cx="10635632" cy="4525963"/>
           </a:xfrm>
           <a:prstGeom prst="rect">
             <a:avLst/>
@@ -3334,7 +3333,7 @@
           <a:p>
             <a:fld id="{3AA9E24A-D52C-CB4E-85D6-C52415601A2A}" type="datetime9">
               <a:rPr lang="he-IL" smtClean="0"/>
-              <a:t>31 ינואר, 2026</a:t>
+              <a:t>8 פברואר, 2026</a:t>
             </a:fld>
             <a:endParaRPr lang="en-US"/>
           </a:p>
@@ -3510,7 +3509,7 @@
         </p:nvSpPr>
         <p:spPr>
           <a:xfrm>
-            <a:off x="-6457700" y="-1080266"/>
+            <a:off x="-6720016" y="-1088358"/>
             <a:ext cx="7329616" cy="7329616"/>
           </a:xfrm>
           <a:custGeom>

--- a/reference.pptx
+++ b/reference.pptx
@@ -231,7 +231,7 @@
           <a:p>
             <a:fld id="{DD925C12-D9C3-4748-B45F-0C5A2B3C54BA}" type="datetimeFigureOut">
               <a:rPr lang="he-IL" smtClean="0"/>
-              <a:t>כ"א.שבט.תשפ"ו</a:t>
+              <a:t>כ"ב.שבט.תשפ"ו</a:t>
             </a:fld>
             <a:endParaRPr lang="he-IL"/>
           </a:p>
@@ -408,7 +408,7 @@
           <a:p>
             <a:fld id="{CAD1E319-67F0-2846-8742-18CC0BED76BD}" type="datetimeFigureOut">
               <a:rPr lang="he-IL" smtClean="0"/>
-              <a:t>כ"א.שבט.תשפ"ו</a:t>
+              <a:t>כ"ב.שבט.תשפ"ו</a:t>
             </a:fld>
             <a:endParaRPr lang="he-IL"/>
           </a:p>
@@ -858,7 +858,7 @@
           <a:p>
             <a:fld id="{A3964B5F-BAD9-9946-9D71-AB5C763DA70C}" type="datetime9">
               <a:rPr lang="he-IL" smtClean="0"/>
-              <a:t>8 פברואר, 2026</a:t>
+              <a:t>9 פברואר, 2026</a:t>
             </a:fld>
             <a:endParaRPr lang="en-US"/>
           </a:p>
@@ -1029,7 +1029,7 @@
           <a:p>
             <a:fld id="{6A744ED6-1944-D14D-91B5-FC6036DE393D}" type="datetime9">
               <a:rPr lang="he-IL" smtClean="0"/>
-              <a:t>8 פברואר, 2026</a:t>
+              <a:t>9 פברואר, 2026</a:t>
             </a:fld>
             <a:endParaRPr lang="en-US"/>
           </a:p>
@@ -1210,7 +1210,7 @@
           <a:p>
             <a:fld id="{37268E4D-FFEC-474C-BD1C-299FD021CBA4}" type="datetime9">
               <a:rPr lang="he-IL" smtClean="0"/>
-              <a:t>8 פברואר, 2026</a:t>
+              <a:t>9 פברואר, 2026</a:t>
             </a:fld>
             <a:endParaRPr lang="en-US"/>
           </a:p>
@@ -1403,7 +1403,7 @@
           <a:p>
             <a:fld id="{29E1EEA0-9609-584F-90F2-46E4F93E52CD}" type="datetime9">
               <a:rPr lang="he-IL" smtClean="0"/>
-              <a:t>8 פברואר, 2026</a:t>
+              <a:t>9 פברואר, 2026</a:t>
             </a:fld>
             <a:endParaRPr lang="en-US"/>
           </a:p>
@@ -1501,7 +1501,7 @@
           <a:p>
             <a:fld id="{BDCA6A5E-CA21-6B4F-9DE7-1A275F321E49}" type="datetime9">
               <a:rPr lang="he-IL" smtClean="0"/>
-              <a:t>8 פברואר, 2026</a:t>
+              <a:t>9 פברואר, 2026</a:t>
             </a:fld>
             <a:endParaRPr lang="en-US"/>
           </a:p>
@@ -1826,7 +1826,7 @@
           <a:p>
             <a:fld id="{AE3C6960-90E0-EA41-937B-E68D4C6A0841}" type="datetime9">
               <a:rPr lang="he-IL" smtClean="0"/>
-              <a:t>8 פברואר, 2026</a:t>
+              <a:t>9 פברואר, 2026</a:t>
             </a:fld>
             <a:endParaRPr lang="en-US"/>
           </a:p>
@@ -2248,7 +2248,7 @@
           <a:p>
             <a:fld id="{38CAE1C8-A9FA-924F-80DA-3B96C0343AF4}" type="datetime9">
               <a:rPr lang="he-IL" smtClean="0"/>
-              <a:t>8 פברואר, 2026</a:t>
+              <a:t>9 פברואר, 2026</a:t>
             </a:fld>
             <a:endParaRPr lang="en-US"/>
           </a:p>
@@ -2313,7 +2313,7 @@
 </file>
 
 <file path=ppt/slideLayouts/slideLayout6.xml><?xml version="1.0" encoding="utf-8"?>
-<p:sldLayout xmlns:a="http://schemas.openxmlformats.org/drawingml/2006/main" xmlns:r="http://schemas.openxmlformats.org/officeDocument/2006/relationships" xmlns:p="http://schemas.openxmlformats.org/presentationml/2006/main" type="titleOnly" preserve="1">
+<p:sldLayout xmlns:a="http://schemas.openxmlformats.org/drawingml/2006/main" xmlns:r="http://schemas.openxmlformats.org/officeDocument/2006/relationships" xmlns:p="http://schemas.openxmlformats.org/presentationml/2006/main" preserve="1" userDrawn="1">
   <p:cSld name="Title Only">
     <p:spTree>
       <p:nvGrpSpPr>
@@ -2368,7 +2368,7 @@
           <a:p>
             <a:fld id="{3DC92AE4-510D-3C40-B9B0-AA6693EED883}" type="datetime9">
               <a:rPr lang="he-IL" smtClean="0"/>
-              <a:t>8 פברואר, 2026</a:t>
+              <a:t>9 פברואר, 2026</a:t>
             </a:fld>
             <a:endParaRPr lang="en-US"/>
           </a:p>
@@ -2416,6 +2416,86 @@
               <a:t>‹#›</a:t>
             </a:fld>
             <a:endParaRPr lang="en-US"/>
+          </a:p>
+        </p:txBody>
+      </p:sp>
+      <p:sp>
+        <p:nvSpPr>
+          <p:cNvPr id="6" name="Content Placeholder 2">
+            <a:extLst>
+              <a:ext uri="{FF2B5EF4-FFF2-40B4-BE49-F238E27FC236}">
+                <a16:creationId xmlns:a16="http://schemas.microsoft.com/office/drawing/2014/main" id="{E1D8F28D-D1D2-34A5-D88A-549DD7AD701A}"/>
+              </a:ext>
+            </a:extLst>
+          </p:cNvPr>
+          <p:cNvSpPr>
+            <a:spLocks noGrp="1"/>
+          </p:cNvSpPr>
+          <p:nvPr>
+            <p:ph idx="1" hasCustomPrompt="1"/>
+          </p:nvPr>
+        </p:nvSpPr>
+        <p:spPr>
+          <a:xfrm>
+            <a:off x="946768" y="1600201"/>
+            <a:ext cx="10635632" cy="4525963"/>
+          </a:xfrm>
+        </p:spPr>
+        <p:txBody>
+          <a:bodyPr>
+            <a:normAutofit/>
+          </a:bodyPr>
+          <a:lstStyle>
+            <a:lvl1pPr>
+              <a:defRPr sz="2800"/>
+            </a:lvl1pPr>
+            <a:lvl2pPr>
+              <a:defRPr sz="2400"/>
+            </a:lvl2pPr>
+            <a:lvl3pPr>
+              <a:defRPr sz="2000"/>
+            </a:lvl3pPr>
+            <a:lvl4pPr>
+              <a:defRPr sz="1800"/>
+            </a:lvl4pPr>
+            <a:lvl5pPr>
+              <a:defRPr sz="1800"/>
+            </a:lvl5pPr>
+          </a:lstStyle>
+          <a:p>
+            <a:pPr lvl="0"/>
+            <a:r>
+              <a:rPr lang="en-US" dirty="0"/>
+              <a:t>Click to edit Master text styles</a:t>
+            </a:r>
+          </a:p>
+          <a:p>
+            <a:pPr lvl="1"/>
+            <a:r>
+              <a:rPr lang="en-US" dirty="0"/>
+              <a:t>Second level</a:t>
+            </a:r>
+          </a:p>
+          <a:p>
+            <a:pPr lvl="2"/>
+            <a:r>
+              <a:rPr lang="en-US" dirty="0"/>
+              <a:t>Third level</a:t>
+            </a:r>
+          </a:p>
+          <a:p>
+            <a:pPr lvl="3"/>
+            <a:r>
+              <a:rPr lang="en-US" dirty="0"/>
+              <a:t>Fourth level</a:t>
+            </a:r>
+          </a:p>
+          <a:p>
+            <a:pPr lvl="4"/>
+            <a:r>
+              <a:rPr lang="en-US" dirty="0"/>
+              <a:t>Fifth level</a:t>
+            </a:r>
           </a:p>
         </p:txBody>
       </p:sp>
@@ -2433,7 +2513,7 @@
 </file>
 
 <file path=ppt/slideLayouts/slideLayout7.xml><?xml version="1.0" encoding="utf-8"?>
-<p:sldLayout xmlns:a="http://schemas.openxmlformats.org/drawingml/2006/main" xmlns:r="http://schemas.openxmlformats.org/officeDocument/2006/relationships" xmlns:p="http://schemas.openxmlformats.org/presentationml/2006/main" type="blank" preserve="1">
+<p:sldLayout xmlns:a="http://schemas.openxmlformats.org/drawingml/2006/main" xmlns:r="http://schemas.openxmlformats.org/officeDocument/2006/relationships" xmlns:p="http://schemas.openxmlformats.org/presentationml/2006/main" preserve="1" userDrawn="1">
   <p:cSld name="Blank">
     <p:spTree>
       <p:nvGrpSpPr>
@@ -2466,7 +2546,7 @@
           <a:p>
             <a:fld id="{E2C5D179-4B48-7641-AFA1-4656153FFCB8}" type="datetime9">
               <a:rPr lang="he-IL" smtClean="0"/>
-              <a:t>8 פברואר, 2026</a:t>
+              <a:t>9 פברואר, 2026</a:t>
             </a:fld>
             <a:endParaRPr lang="en-US"/>
           </a:p>
@@ -2514,6 +2594,86 @@
               <a:t>‹#›</a:t>
             </a:fld>
             <a:endParaRPr lang="en-US"/>
+          </a:p>
+        </p:txBody>
+      </p:sp>
+      <p:sp>
+        <p:nvSpPr>
+          <p:cNvPr id="5" name="Content Placeholder 2">
+            <a:extLst>
+              <a:ext uri="{FF2B5EF4-FFF2-40B4-BE49-F238E27FC236}">
+                <a16:creationId xmlns:a16="http://schemas.microsoft.com/office/drawing/2014/main" id="{3F1439EE-8346-69C4-2D2A-C45C952E131C}"/>
+              </a:ext>
+            </a:extLst>
+          </p:cNvPr>
+          <p:cNvSpPr>
+            <a:spLocks noGrp="1"/>
+          </p:cNvSpPr>
+          <p:nvPr>
+            <p:ph idx="1" hasCustomPrompt="1"/>
+          </p:nvPr>
+        </p:nvSpPr>
+        <p:spPr>
+          <a:xfrm>
+            <a:off x="946768" y="1600201"/>
+            <a:ext cx="10635632" cy="4525963"/>
+          </a:xfrm>
+        </p:spPr>
+        <p:txBody>
+          <a:bodyPr>
+            <a:normAutofit/>
+          </a:bodyPr>
+          <a:lstStyle>
+            <a:lvl1pPr>
+              <a:defRPr sz="2800"/>
+            </a:lvl1pPr>
+            <a:lvl2pPr>
+              <a:defRPr sz="2400"/>
+            </a:lvl2pPr>
+            <a:lvl3pPr>
+              <a:defRPr sz="2000"/>
+            </a:lvl3pPr>
+            <a:lvl4pPr>
+              <a:defRPr sz="1800"/>
+            </a:lvl4pPr>
+            <a:lvl5pPr>
+              <a:defRPr sz="1800"/>
+            </a:lvl5pPr>
+          </a:lstStyle>
+          <a:p>
+            <a:pPr lvl="0"/>
+            <a:r>
+              <a:rPr lang="en-US" dirty="0"/>
+              <a:t>Click to edit Master text styles</a:t>
+            </a:r>
+          </a:p>
+          <a:p>
+            <a:pPr lvl="1"/>
+            <a:r>
+              <a:rPr lang="en-US" dirty="0"/>
+              <a:t>Second level</a:t>
+            </a:r>
+          </a:p>
+          <a:p>
+            <a:pPr lvl="2"/>
+            <a:r>
+              <a:rPr lang="en-US" dirty="0"/>
+              <a:t>Third level</a:t>
+            </a:r>
+          </a:p>
+          <a:p>
+            <a:pPr lvl="3"/>
+            <a:r>
+              <a:rPr lang="en-US" dirty="0"/>
+              <a:t>Fourth level</a:t>
+            </a:r>
+          </a:p>
+          <a:p>
+            <a:pPr lvl="4"/>
+            <a:r>
+              <a:rPr lang="en-US" dirty="0"/>
+              <a:t>Fifth level</a:t>
+            </a:r>
           </a:p>
         </p:txBody>
       </p:sp>
@@ -2564,7 +2724,7 @@
           <a:p>
             <a:fld id="{B2D96A8D-C7E4-194A-BF0A-D552B24EBF94}" type="datetime9">
               <a:rPr lang="he-IL" smtClean="0"/>
-              <a:t>8 פברואר, 2026</a:t>
+              <a:t>9 פברואר, 2026</a:t>
             </a:fld>
             <a:endParaRPr lang="en-US"/>
           </a:p>
@@ -3003,7 +3163,7 @@
           <a:p>
             <a:fld id="{A12B2D52-0D9F-F345-8384-0DCA30BF1F04}" type="datetime9">
               <a:rPr lang="he-IL" smtClean="0"/>
-              <a:t>8 פברואר, 2026</a:t>
+              <a:t>9 פברואר, 2026</a:t>
             </a:fld>
             <a:endParaRPr lang="en-US"/>
           </a:p>
@@ -3333,7 +3493,7 @@
           <a:p>
             <a:fld id="{3AA9E24A-D52C-CB4E-85D6-C52415601A2A}" type="datetime9">
               <a:rPr lang="he-IL" smtClean="0"/>
-              <a:t>8 פברואר, 2026</a:t>
+              <a:t>9 פברואר, 2026</a:t>
             </a:fld>
             <a:endParaRPr lang="en-US"/>
           </a:p>

--- a/reference.pptx
+++ b/reference.pptx
@@ -5,10 +5,10 @@
     <p:sldMasterId id="2147483648" r:id="rId1"/>
   </p:sldMasterIdLst>
   <p:notesMasterIdLst>
-    <p:notesMasterId r:id="rId8"/>
+    <p:notesMasterId r:id="rId9"/>
   </p:notesMasterIdLst>
   <p:handoutMasterIdLst>
-    <p:handoutMasterId r:id="rId9"/>
+    <p:handoutMasterId r:id="rId10"/>
   </p:handoutMasterIdLst>
   <p:sldIdLst>
     <p:sldId id="256" r:id="rId2"/>
@@ -16,7 +16,8 @@
     <p:sldId id="258" r:id="rId4"/>
     <p:sldId id="259" r:id="rId5"/>
     <p:sldId id="260" r:id="rId6"/>
-    <p:sldId id="261" r:id="rId7"/>
+    <p:sldId id="262" r:id="rId7"/>
+    <p:sldId id="261" r:id="rId8"/>
   </p:sldIdLst>
   <p:sldSz cx="12192000" cy="6858000"/>
   <p:notesSz cx="6858000" cy="9144000"/>
@@ -231,7 +232,7 @@
           <a:p>
             <a:fld id="{DD925C12-D9C3-4748-B45F-0C5A2B3C54BA}" type="datetimeFigureOut">
               <a:rPr lang="he-IL" smtClean="0"/>
-              <a:t>כ"ב.שבט.תשפ"ו</a:t>
+              <a:t>כ"ג.שבט.תשפ"ו</a:t>
             </a:fld>
             <a:endParaRPr lang="he-IL"/>
           </a:p>
@@ -408,7 +409,7 @@
           <a:p>
             <a:fld id="{CAD1E319-67F0-2846-8742-18CC0BED76BD}" type="datetimeFigureOut">
               <a:rPr lang="he-IL" smtClean="0"/>
-              <a:t>כ"ב.שבט.תשפ"ו</a:t>
+              <a:t>כ"ג.שבט.תשפ"ו</a:t>
             </a:fld>
             <a:endParaRPr lang="he-IL"/>
           </a:p>
@@ -858,7 +859,7 @@
           <a:p>
             <a:fld id="{A3964B5F-BAD9-9946-9D71-AB5C763DA70C}" type="datetime9">
               <a:rPr lang="he-IL" smtClean="0"/>
-              <a:t>9 פברואר, 2026</a:t>
+              <a:t>10 פברואר, 2026</a:t>
             </a:fld>
             <a:endParaRPr lang="en-US"/>
           </a:p>
@@ -923,6 +924,261 @@
 </file>
 
 <file path=ppt/slideLayouts/slideLayout10.xml><?xml version="1.0" encoding="utf-8"?>
+<p:sldLayout xmlns:a="http://schemas.openxmlformats.org/drawingml/2006/main" xmlns:r="http://schemas.openxmlformats.org/officeDocument/2006/relationships" xmlns:p="http://schemas.openxmlformats.org/presentationml/2006/main" type="picTx" preserve="1">
+  <p:cSld name="Picture with Caption">
+    <p:spTree>
+      <p:nvGrpSpPr>
+        <p:cNvPr id="1" name=""/>
+        <p:cNvGrpSpPr/>
+        <p:nvPr/>
+      </p:nvGrpSpPr>
+      <p:grpSpPr>
+        <a:xfrm>
+          <a:off x="0" y="0"/>
+          <a:ext cx="0" cy="0"/>
+          <a:chOff x="0" y="0"/>
+          <a:chExt cx="0" cy="0"/>
+        </a:xfrm>
+      </p:grpSpPr>
+      <p:sp>
+        <p:nvSpPr>
+          <p:cNvPr id="2" name="Title 1"/>
+          <p:cNvSpPr>
+            <a:spLocks noGrp="1"/>
+          </p:cNvSpPr>
+          <p:nvPr>
+            <p:ph type="title"/>
+          </p:nvPr>
+        </p:nvSpPr>
+        <p:spPr>
+          <a:xfrm>
+            <a:off x="2389717" y="4800600"/>
+            <a:ext cx="7315200" cy="566738"/>
+          </a:xfrm>
+        </p:spPr>
+        <p:txBody>
+          <a:bodyPr anchor="b"/>
+          <a:lstStyle>
+            <a:lvl1pPr algn="l">
+              <a:defRPr sz="2000" b="1"/>
+            </a:lvl1pPr>
+          </a:lstStyle>
+          <a:p>
+            <a:r>
+              <a:rPr lang="en-US"/>
+              <a:t>Click to edit Master title style</a:t>
+            </a:r>
+          </a:p>
+        </p:txBody>
+      </p:sp>
+      <p:sp>
+        <p:nvSpPr>
+          <p:cNvPr id="3" name="Picture Placeholder 2"/>
+          <p:cNvSpPr>
+            <a:spLocks noGrp="1"/>
+          </p:cNvSpPr>
+          <p:nvPr>
+            <p:ph type="pic" idx="1"/>
+          </p:nvPr>
+        </p:nvSpPr>
+        <p:spPr>
+          <a:xfrm>
+            <a:off x="2389717" y="612775"/>
+            <a:ext cx="7315200" cy="4114800"/>
+          </a:xfrm>
+        </p:spPr>
+        <p:txBody>
+          <a:bodyPr/>
+          <a:lstStyle>
+            <a:lvl1pPr marL="0" indent="0">
+              <a:buNone/>
+              <a:defRPr sz="3200"/>
+            </a:lvl1pPr>
+            <a:lvl2pPr marL="457200" indent="0">
+              <a:buNone/>
+              <a:defRPr sz="2800"/>
+            </a:lvl2pPr>
+            <a:lvl3pPr marL="914400" indent="0">
+              <a:buNone/>
+              <a:defRPr sz="2400"/>
+            </a:lvl3pPr>
+            <a:lvl4pPr marL="1371600" indent="0">
+              <a:buNone/>
+              <a:defRPr sz="2000"/>
+            </a:lvl4pPr>
+            <a:lvl5pPr marL="1828800" indent="0">
+              <a:buNone/>
+              <a:defRPr sz="2000"/>
+            </a:lvl5pPr>
+            <a:lvl6pPr marL="2286000" indent="0">
+              <a:buNone/>
+              <a:defRPr sz="2000"/>
+            </a:lvl6pPr>
+            <a:lvl7pPr marL="2743200" indent="0">
+              <a:buNone/>
+              <a:defRPr sz="2000"/>
+            </a:lvl7pPr>
+            <a:lvl8pPr marL="3200400" indent="0">
+              <a:buNone/>
+              <a:defRPr sz="2000"/>
+            </a:lvl8pPr>
+            <a:lvl9pPr marL="3657600" indent="0">
+              <a:buNone/>
+              <a:defRPr sz="2000"/>
+            </a:lvl9pPr>
+          </a:lstStyle>
+          <a:p>
+            <a:endParaRPr lang="en-US"/>
+          </a:p>
+        </p:txBody>
+      </p:sp>
+      <p:sp>
+        <p:nvSpPr>
+          <p:cNvPr id="4" name="Text Placeholder 3"/>
+          <p:cNvSpPr>
+            <a:spLocks noGrp="1"/>
+          </p:cNvSpPr>
+          <p:nvPr>
+            <p:ph type="body" sz="half" idx="2"/>
+          </p:nvPr>
+        </p:nvSpPr>
+        <p:spPr>
+          <a:xfrm>
+            <a:off x="2389717" y="5367338"/>
+            <a:ext cx="7315200" cy="804862"/>
+          </a:xfrm>
+        </p:spPr>
+        <p:txBody>
+          <a:bodyPr/>
+          <a:lstStyle>
+            <a:lvl1pPr marL="0" indent="0">
+              <a:buNone/>
+              <a:defRPr sz="1400"/>
+            </a:lvl1pPr>
+            <a:lvl2pPr marL="457200" indent="0">
+              <a:buNone/>
+              <a:defRPr sz="1200"/>
+            </a:lvl2pPr>
+            <a:lvl3pPr marL="914400" indent="0">
+              <a:buNone/>
+              <a:defRPr sz="1000"/>
+            </a:lvl3pPr>
+            <a:lvl4pPr marL="1371600" indent="0">
+              <a:buNone/>
+              <a:defRPr sz="900"/>
+            </a:lvl4pPr>
+            <a:lvl5pPr marL="1828800" indent="0">
+              <a:buNone/>
+              <a:defRPr sz="900"/>
+            </a:lvl5pPr>
+            <a:lvl6pPr marL="2286000" indent="0">
+              <a:buNone/>
+              <a:defRPr sz="900"/>
+            </a:lvl6pPr>
+            <a:lvl7pPr marL="2743200" indent="0">
+              <a:buNone/>
+              <a:defRPr sz="900"/>
+            </a:lvl7pPr>
+            <a:lvl8pPr marL="3200400" indent="0">
+              <a:buNone/>
+              <a:defRPr sz="900"/>
+            </a:lvl8pPr>
+            <a:lvl9pPr marL="3657600" indent="0">
+              <a:buNone/>
+              <a:defRPr sz="900"/>
+            </a:lvl9pPr>
+          </a:lstStyle>
+          <a:p>
+            <a:pPr lvl="0"/>
+            <a:r>
+              <a:rPr lang="en-US"/>
+              <a:t>Click to edit Master text styles</a:t>
+            </a:r>
+          </a:p>
+        </p:txBody>
+      </p:sp>
+      <p:sp>
+        <p:nvSpPr>
+          <p:cNvPr id="5" name="Date Placeholder 4"/>
+          <p:cNvSpPr>
+            <a:spLocks noGrp="1"/>
+          </p:cNvSpPr>
+          <p:nvPr>
+            <p:ph type="dt" sz="half" idx="10"/>
+          </p:nvPr>
+        </p:nvSpPr>
+        <p:spPr/>
+        <p:txBody>
+          <a:bodyPr/>
+          <a:lstStyle/>
+          <a:p>
+            <a:fld id="{A12B2D52-0D9F-F345-8384-0DCA30BF1F04}" type="datetime9">
+              <a:rPr lang="he-IL" smtClean="0"/>
+              <a:t>10 פברואר, 2026</a:t>
+            </a:fld>
+            <a:endParaRPr lang="en-US"/>
+          </a:p>
+        </p:txBody>
+      </p:sp>
+      <p:sp>
+        <p:nvSpPr>
+          <p:cNvPr id="6" name="Footer Placeholder 5"/>
+          <p:cNvSpPr>
+            <a:spLocks noGrp="1"/>
+          </p:cNvSpPr>
+          <p:nvPr>
+            <p:ph type="ftr" sz="quarter" idx="11"/>
+          </p:nvPr>
+        </p:nvSpPr>
+        <p:spPr/>
+        <p:txBody>
+          <a:bodyPr/>
+          <a:lstStyle/>
+          <a:p>
+            <a:r>
+              <a:rPr lang="en-US"/>
+              <a:t>Or Peretz</a:t>
+            </a:r>
+          </a:p>
+        </p:txBody>
+      </p:sp>
+      <p:sp>
+        <p:nvSpPr>
+          <p:cNvPr id="7" name="Slide Number Placeholder 6"/>
+          <p:cNvSpPr>
+            <a:spLocks noGrp="1"/>
+          </p:cNvSpPr>
+          <p:nvPr>
+            <p:ph type="sldNum" sz="quarter" idx="12"/>
+          </p:nvPr>
+        </p:nvSpPr>
+        <p:spPr/>
+        <p:txBody>
+          <a:bodyPr/>
+          <a:lstStyle/>
+          <a:p>
+            <a:fld id="{C1FF6DA9-008F-8B48-92A6-B652298478BF}" type="slidenum">
+              <a:rPr lang="en-US" smtClean="0"/>
+              <a:t>‹#›</a:t>
+            </a:fld>
+            <a:endParaRPr lang="en-US"/>
+          </a:p>
+        </p:txBody>
+      </p:sp>
+    </p:spTree>
+    <p:extLst>
+      <p:ext uri="{BB962C8B-B14F-4D97-AF65-F5344CB8AC3E}">
+        <p14:creationId xmlns:p14="http://schemas.microsoft.com/office/powerpoint/2010/main" val="3889236939"/>
+      </p:ext>
+    </p:extLst>
+  </p:cSld>
+  <p:clrMapOvr>
+    <a:masterClrMapping/>
+  </p:clrMapOvr>
+</p:sldLayout>
+</file>
+
+<file path=ppt/slideLayouts/slideLayout11.xml><?xml version="1.0" encoding="utf-8"?>
 <p:sldLayout xmlns:a="http://schemas.openxmlformats.org/drawingml/2006/main" xmlns:r="http://schemas.openxmlformats.org/officeDocument/2006/relationships" xmlns:p="http://schemas.openxmlformats.org/presentationml/2006/main" type="vertTx" preserve="1">
   <p:cSld name="Title and Vertical Text">
     <p:spTree>
@@ -1029,7 +1285,7 @@
           <a:p>
             <a:fld id="{6A744ED6-1944-D14D-91B5-FC6036DE393D}" type="datetime9">
               <a:rPr lang="he-IL" smtClean="0"/>
-              <a:t>9 פברואר, 2026</a:t>
+              <a:t>10 פברואר, 2026</a:t>
             </a:fld>
             <a:endParaRPr lang="en-US"/>
           </a:p>
@@ -1093,7 +1349,7 @@
 </p:sldLayout>
 </file>
 
-<file path=ppt/slideLayouts/slideLayout11.xml><?xml version="1.0" encoding="utf-8"?>
+<file path=ppt/slideLayouts/slideLayout12.xml><?xml version="1.0" encoding="utf-8"?>
 <p:sldLayout xmlns:a="http://schemas.openxmlformats.org/drawingml/2006/main" xmlns:r="http://schemas.openxmlformats.org/officeDocument/2006/relationships" xmlns:p="http://schemas.openxmlformats.org/presentationml/2006/main" type="vertTitleAndTx" preserve="1">
   <p:cSld name="Vertical Title and Text">
     <p:spTree>
@@ -1210,7 +1466,7 @@
           <a:p>
             <a:fld id="{37268E4D-FFEC-474C-BD1C-299FD021CBA4}" type="datetime9">
               <a:rPr lang="he-IL" smtClean="0"/>
-              <a:t>9 פברואר, 2026</a:t>
+              <a:t>10 פברואר, 2026</a:t>
             </a:fld>
             <a:endParaRPr lang="en-US"/>
           </a:p>
@@ -1403,7 +1659,7 @@
           <a:p>
             <a:fld id="{29E1EEA0-9609-584F-90F2-46E4F93E52CD}" type="datetime9">
               <a:rPr lang="he-IL" smtClean="0"/>
-              <a:t>9 פברואר, 2026</a:t>
+              <a:t>10 פברואר, 2026</a:t>
             </a:fld>
             <a:endParaRPr lang="en-US"/>
           </a:p>
@@ -1501,7 +1757,7 @@
           <a:p>
             <a:fld id="{BDCA6A5E-CA21-6B4F-9DE7-1A275F321E49}" type="datetime9">
               <a:rPr lang="he-IL" smtClean="0"/>
-              <a:t>9 פברואר, 2026</a:t>
+              <a:t>10 פברואר, 2026</a:t>
             </a:fld>
             <a:endParaRPr lang="en-US"/>
           </a:p>
@@ -1826,7 +2082,7 @@
           <a:p>
             <a:fld id="{AE3C6960-90E0-EA41-937B-E68D4C6A0841}" type="datetime9">
               <a:rPr lang="he-IL" smtClean="0"/>
-              <a:t>9 פברואר, 2026</a:t>
+              <a:t>10 פברואר, 2026</a:t>
             </a:fld>
             <a:endParaRPr lang="en-US"/>
           </a:p>
@@ -1891,7 +2147,7 @@
 </file>
 
 <file path=ppt/slideLayouts/slideLayout5.xml><?xml version="1.0" encoding="utf-8"?>
-<p:sldLayout xmlns:a="http://schemas.openxmlformats.org/drawingml/2006/main" xmlns:r="http://schemas.openxmlformats.org/officeDocument/2006/relationships" xmlns:p="http://schemas.openxmlformats.org/presentationml/2006/main" type="twoTxTwoObj" preserve="1">
+<p:sldLayout xmlns:a="http://schemas.openxmlformats.org/drawingml/2006/main" xmlns:r="http://schemas.openxmlformats.org/officeDocument/2006/relationships" xmlns:p="http://schemas.openxmlformats.org/presentationml/2006/main" preserve="1" userDrawn="1">
   <p:cSld name="Comparison">
     <p:spTree>
       <p:nvGrpSpPr>
@@ -1909,806 +2165,6 @@
       </p:grpSpPr>
       <p:sp>
         <p:nvSpPr>
-          <p:cNvPr id="2" name="Title 1"/>
-          <p:cNvSpPr>
-            <a:spLocks noGrp="1"/>
-          </p:cNvSpPr>
-          <p:nvPr>
-            <p:ph type="title"/>
-          </p:nvPr>
-        </p:nvSpPr>
-        <p:spPr/>
-        <p:txBody>
-          <a:bodyPr/>
-          <a:lstStyle>
-            <a:lvl1pPr>
-              <a:defRPr/>
-            </a:lvl1pPr>
-          </a:lstStyle>
-          <a:p>
-            <a:r>
-              <a:rPr lang="en-US"/>
-              <a:t>Click to edit Master title style</a:t>
-            </a:r>
-          </a:p>
-        </p:txBody>
-      </p:sp>
-      <p:sp>
-        <p:nvSpPr>
-          <p:cNvPr id="3" name="Text Placeholder 2"/>
-          <p:cNvSpPr>
-            <a:spLocks noGrp="1"/>
-          </p:cNvSpPr>
-          <p:nvPr>
-            <p:ph type="body" idx="1"/>
-          </p:nvPr>
-        </p:nvSpPr>
-        <p:spPr>
-          <a:xfrm>
-            <a:off x="609600" y="1535113"/>
-            <a:ext cx="5386917" cy="639762"/>
-          </a:xfrm>
-        </p:spPr>
-        <p:txBody>
-          <a:bodyPr anchor="b"/>
-          <a:lstStyle>
-            <a:lvl1pPr marL="0" indent="0">
-              <a:buNone/>
-              <a:defRPr sz="2400" b="1"/>
-            </a:lvl1pPr>
-            <a:lvl2pPr marL="457200" indent="0">
-              <a:buNone/>
-              <a:defRPr sz="2000" b="1"/>
-            </a:lvl2pPr>
-            <a:lvl3pPr marL="914400" indent="0">
-              <a:buNone/>
-              <a:defRPr sz="1800" b="1"/>
-            </a:lvl3pPr>
-            <a:lvl4pPr marL="1371600" indent="0">
-              <a:buNone/>
-              <a:defRPr sz="1600" b="1"/>
-            </a:lvl4pPr>
-            <a:lvl5pPr marL="1828800" indent="0">
-              <a:buNone/>
-              <a:defRPr sz="1600" b="1"/>
-            </a:lvl5pPr>
-            <a:lvl6pPr marL="2286000" indent="0">
-              <a:buNone/>
-              <a:defRPr sz="1600" b="1"/>
-            </a:lvl6pPr>
-            <a:lvl7pPr marL="2743200" indent="0">
-              <a:buNone/>
-              <a:defRPr sz="1600" b="1"/>
-            </a:lvl7pPr>
-            <a:lvl8pPr marL="3200400" indent="0">
-              <a:buNone/>
-              <a:defRPr sz="1600" b="1"/>
-            </a:lvl8pPr>
-            <a:lvl9pPr marL="3657600" indent="0">
-              <a:buNone/>
-              <a:defRPr sz="1600" b="1"/>
-            </a:lvl9pPr>
-          </a:lstStyle>
-          <a:p>
-            <a:pPr lvl="0"/>
-            <a:r>
-              <a:rPr lang="en-US"/>
-              <a:t>Click to edit Master text styles</a:t>
-            </a:r>
-          </a:p>
-        </p:txBody>
-      </p:sp>
-      <p:sp>
-        <p:nvSpPr>
-          <p:cNvPr id="4" name="Content Placeholder 3"/>
-          <p:cNvSpPr>
-            <a:spLocks noGrp="1"/>
-          </p:cNvSpPr>
-          <p:nvPr>
-            <p:ph sz="half" idx="2"/>
-          </p:nvPr>
-        </p:nvSpPr>
-        <p:spPr>
-          <a:xfrm>
-            <a:off x="609600" y="2174875"/>
-            <a:ext cx="5386917" cy="3951288"/>
-          </a:xfrm>
-        </p:spPr>
-        <p:txBody>
-          <a:bodyPr/>
-          <a:lstStyle>
-            <a:lvl1pPr>
-              <a:defRPr sz="2400"/>
-            </a:lvl1pPr>
-            <a:lvl2pPr>
-              <a:defRPr sz="2000"/>
-            </a:lvl2pPr>
-            <a:lvl3pPr>
-              <a:defRPr sz="1800"/>
-            </a:lvl3pPr>
-            <a:lvl4pPr>
-              <a:defRPr sz="1600"/>
-            </a:lvl4pPr>
-            <a:lvl5pPr>
-              <a:defRPr sz="1600"/>
-            </a:lvl5pPr>
-            <a:lvl6pPr>
-              <a:defRPr sz="1600"/>
-            </a:lvl6pPr>
-            <a:lvl7pPr>
-              <a:defRPr sz="1600"/>
-            </a:lvl7pPr>
-            <a:lvl8pPr>
-              <a:defRPr sz="1600"/>
-            </a:lvl8pPr>
-            <a:lvl9pPr>
-              <a:defRPr sz="1600"/>
-            </a:lvl9pPr>
-          </a:lstStyle>
-          <a:p>
-            <a:pPr lvl="0"/>
-            <a:r>
-              <a:rPr lang="en-US"/>
-              <a:t>Click to edit Master text styles</a:t>
-            </a:r>
-          </a:p>
-          <a:p>
-            <a:pPr lvl="1"/>
-            <a:r>
-              <a:rPr lang="en-US"/>
-              <a:t>Second level</a:t>
-            </a:r>
-          </a:p>
-          <a:p>
-            <a:pPr lvl="2"/>
-            <a:r>
-              <a:rPr lang="en-US"/>
-              <a:t>Third level</a:t>
-            </a:r>
-          </a:p>
-          <a:p>
-            <a:pPr lvl="3"/>
-            <a:r>
-              <a:rPr lang="en-US"/>
-              <a:t>Fourth level</a:t>
-            </a:r>
-          </a:p>
-          <a:p>
-            <a:pPr lvl="4"/>
-            <a:r>
-              <a:rPr lang="en-US"/>
-              <a:t>Fifth level</a:t>
-            </a:r>
-          </a:p>
-        </p:txBody>
-      </p:sp>
-      <p:sp>
-        <p:nvSpPr>
-          <p:cNvPr id="5" name="Text Placeholder 4"/>
-          <p:cNvSpPr>
-            <a:spLocks noGrp="1"/>
-          </p:cNvSpPr>
-          <p:nvPr>
-            <p:ph type="body" sz="quarter" idx="3"/>
-          </p:nvPr>
-        </p:nvSpPr>
-        <p:spPr>
-          <a:xfrm>
-            <a:off x="6193368" y="1535113"/>
-            <a:ext cx="5389033" cy="639762"/>
-          </a:xfrm>
-        </p:spPr>
-        <p:txBody>
-          <a:bodyPr anchor="b"/>
-          <a:lstStyle>
-            <a:lvl1pPr marL="0" indent="0">
-              <a:buNone/>
-              <a:defRPr sz="2400" b="1"/>
-            </a:lvl1pPr>
-            <a:lvl2pPr marL="457200" indent="0">
-              <a:buNone/>
-              <a:defRPr sz="2000" b="1"/>
-            </a:lvl2pPr>
-            <a:lvl3pPr marL="914400" indent="0">
-              <a:buNone/>
-              <a:defRPr sz="1800" b="1"/>
-            </a:lvl3pPr>
-            <a:lvl4pPr marL="1371600" indent="0">
-              <a:buNone/>
-              <a:defRPr sz="1600" b="1"/>
-            </a:lvl4pPr>
-            <a:lvl5pPr marL="1828800" indent="0">
-              <a:buNone/>
-              <a:defRPr sz="1600" b="1"/>
-            </a:lvl5pPr>
-            <a:lvl6pPr marL="2286000" indent="0">
-              <a:buNone/>
-              <a:defRPr sz="1600" b="1"/>
-            </a:lvl6pPr>
-            <a:lvl7pPr marL="2743200" indent="0">
-              <a:buNone/>
-              <a:defRPr sz="1600" b="1"/>
-            </a:lvl7pPr>
-            <a:lvl8pPr marL="3200400" indent="0">
-              <a:buNone/>
-              <a:defRPr sz="1600" b="1"/>
-            </a:lvl8pPr>
-            <a:lvl9pPr marL="3657600" indent="0">
-              <a:buNone/>
-              <a:defRPr sz="1600" b="1"/>
-            </a:lvl9pPr>
-          </a:lstStyle>
-          <a:p>
-            <a:pPr lvl="0"/>
-            <a:r>
-              <a:rPr lang="en-US"/>
-              <a:t>Click to edit Master text styles</a:t>
-            </a:r>
-          </a:p>
-        </p:txBody>
-      </p:sp>
-      <p:sp>
-        <p:nvSpPr>
-          <p:cNvPr id="6" name="Content Placeholder 5"/>
-          <p:cNvSpPr>
-            <a:spLocks noGrp="1"/>
-          </p:cNvSpPr>
-          <p:nvPr>
-            <p:ph sz="quarter" idx="4"/>
-          </p:nvPr>
-        </p:nvSpPr>
-        <p:spPr>
-          <a:xfrm>
-            <a:off x="6193368" y="2174875"/>
-            <a:ext cx="5389033" cy="3951288"/>
-          </a:xfrm>
-        </p:spPr>
-        <p:txBody>
-          <a:bodyPr/>
-          <a:lstStyle>
-            <a:lvl1pPr>
-              <a:defRPr sz="2400"/>
-            </a:lvl1pPr>
-            <a:lvl2pPr>
-              <a:defRPr sz="2000"/>
-            </a:lvl2pPr>
-            <a:lvl3pPr>
-              <a:defRPr sz="1800"/>
-            </a:lvl3pPr>
-            <a:lvl4pPr>
-              <a:defRPr sz="1600"/>
-            </a:lvl4pPr>
-            <a:lvl5pPr>
-              <a:defRPr sz="1600"/>
-            </a:lvl5pPr>
-            <a:lvl6pPr>
-              <a:defRPr sz="1600"/>
-            </a:lvl6pPr>
-            <a:lvl7pPr>
-              <a:defRPr sz="1600"/>
-            </a:lvl7pPr>
-            <a:lvl8pPr>
-              <a:defRPr sz="1600"/>
-            </a:lvl8pPr>
-            <a:lvl9pPr>
-              <a:defRPr sz="1600"/>
-            </a:lvl9pPr>
-          </a:lstStyle>
-          <a:p>
-            <a:pPr lvl="0"/>
-            <a:r>
-              <a:rPr lang="en-US"/>
-              <a:t>Click to edit Master text styles</a:t>
-            </a:r>
-          </a:p>
-          <a:p>
-            <a:pPr lvl="1"/>
-            <a:r>
-              <a:rPr lang="en-US"/>
-              <a:t>Second level</a:t>
-            </a:r>
-          </a:p>
-          <a:p>
-            <a:pPr lvl="2"/>
-            <a:r>
-              <a:rPr lang="en-US"/>
-              <a:t>Third level</a:t>
-            </a:r>
-          </a:p>
-          <a:p>
-            <a:pPr lvl="3"/>
-            <a:r>
-              <a:rPr lang="en-US"/>
-              <a:t>Fourth level</a:t>
-            </a:r>
-          </a:p>
-          <a:p>
-            <a:pPr lvl="4"/>
-            <a:r>
-              <a:rPr lang="en-US"/>
-              <a:t>Fifth level</a:t>
-            </a:r>
-          </a:p>
-        </p:txBody>
-      </p:sp>
-      <p:sp>
-        <p:nvSpPr>
-          <p:cNvPr id="7" name="Date Placeholder 6"/>
-          <p:cNvSpPr>
-            <a:spLocks noGrp="1"/>
-          </p:cNvSpPr>
-          <p:nvPr>
-            <p:ph type="dt" sz="half" idx="10"/>
-          </p:nvPr>
-        </p:nvSpPr>
-        <p:spPr/>
-        <p:txBody>
-          <a:bodyPr/>
-          <a:lstStyle/>
-          <a:p>
-            <a:fld id="{38CAE1C8-A9FA-924F-80DA-3B96C0343AF4}" type="datetime9">
-              <a:rPr lang="he-IL" smtClean="0"/>
-              <a:t>9 פברואר, 2026</a:t>
-            </a:fld>
-            <a:endParaRPr lang="en-US"/>
-          </a:p>
-        </p:txBody>
-      </p:sp>
-      <p:sp>
-        <p:nvSpPr>
-          <p:cNvPr id="8" name="Footer Placeholder 7"/>
-          <p:cNvSpPr>
-            <a:spLocks noGrp="1"/>
-          </p:cNvSpPr>
-          <p:nvPr>
-            <p:ph type="ftr" sz="quarter" idx="11"/>
-          </p:nvPr>
-        </p:nvSpPr>
-        <p:spPr/>
-        <p:txBody>
-          <a:bodyPr/>
-          <a:lstStyle/>
-          <a:p>
-            <a:r>
-              <a:rPr lang="en-US"/>
-              <a:t>Or Peretz</a:t>
-            </a:r>
-          </a:p>
-        </p:txBody>
-      </p:sp>
-      <p:sp>
-        <p:nvSpPr>
-          <p:cNvPr id="9" name="Slide Number Placeholder 8"/>
-          <p:cNvSpPr>
-            <a:spLocks noGrp="1"/>
-          </p:cNvSpPr>
-          <p:nvPr>
-            <p:ph type="sldNum" sz="quarter" idx="12"/>
-          </p:nvPr>
-        </p:nvSpPr>
-        <p:spPr/>
-        <p:txBody>
-          <a:bodyPr/>
-          <a:lstStyle/>
-          <a:p>
-            <a:fld id="{C1FF6DA9-008F-8B48-92A6-B652298478BF}" type="slidenum">
-              <a:rPr lang="en-US" smtClean="0"/>
-              <a:t>‹#›</a:t>
-            </a:fld>
-            <a:endParaRPr lang="en-US"/>
-          </a:p>
-        </p:txBody>
-      </p:sp>
-    </p:spTree>
-    <p:extLst>
-      <p:ext uri="{BB962C8B-B14F-4D97-AF65-F5344CB8AC3E}">
-        <p14:creationId xmlns:p14="http://schemas.microsoft.com/office/powerpoint/2010/main" val="990158736"/>
-      </p:ext>
-    </p:extLst>
-  </p:cSld>
-  <p:clrMapOvr>
-    <a:masterClrMapping/>
-  </p:clrMapOvr>
-</p:sldLayout>
-</file>
-
-<file path=ppt/slideLayouts/slideLayout6.xml><?xml version="1.0" encoding="utf-8"?>
-<p:sldLayout xmlns:a="http://schemas.openxmlformats.org/drawingml/2006/main" xmlns:r="http://schemas.openxmlformats.org/officeDocument/2006/relationships" xmlns:p="http://schemas.openxmlformats.org/presentationml/2006/main" preserve="1" userDrawn="1">
-  <p:cSld name="Title Only">
-    <p:spTree>
-      <p:nvGrpSpPr>
-        <p:cNvPr id="1" name=""/>
-        <p:cNvGrpSpPr/>
-        <p:nvPr/>
-      </p:nvGrpSpPr>
-      <p:grpSpPr>
-        <a:xfrm>
-          <a:off x="0" y="0"/>
-          <a:ext cx="0" cy="0"/>
-          <a:chOff x="0" y="0"/>
-          <a:chExt cx="0" cy="0"/>
-        </a:xfrm>
-      </p:grpSpPr>
-      <p:sp>
-        <p:nvSpPr>
-          <p:cNvPr id="2" name="Title 1"/>
-          <p:cNvSpPr>
-            <a:spLocks noGrp="1"/>
-          </p:cNvSpPr>
-          <p:nvPr>
-            <p:ph type="title"/>
-          </p:nvPr>
-        </p:nvSpPr>
-        <p:spPr/>
-        <p:txBody>
-          <a:bodyPr/>
-          <a:lstStyle/>
-          <a:p>
-            <a:r>
-              <a:rPr lang="en-US"/>
-              <a:t>Click to edit Master title style</a:t>
-            </a:r>
-          </a:p>
-        </p:txBody>
-      </p:sp>
-      <p:sp>
-        <p:nvSpPr>
-          <p:cNvPr id="3" name="Date Placeholder 2"/>
-          <p:cNvSpPr>
-            <a:spLocks noGrp="1"/>
-          </p:cNvSpPr>
-          <p:nvPr>
-            <p:ph type="dt" sz="half" idx="10"/>
-          </p:nvPr>
-        </p:nvSpPr>
-        <p:spPr/>
-        <p:txBody>
-          <a:bodyPr/>
-          <a:lstStyle/>
-          <a:p>
-            <a:fld id="{3DC92AE4-510D-3C40-B9B0-AA6693EED883}" type="datetime9">
-              <a:rPr lang="he-IL" smtClean="0"/>
-              <a:t>9 פברואר, 2026</a:t>
-            </a:fld>
-            <a:endParaRPr lang="en-US"/>
-          </a:p>
-        </p:txBody>
-      </p:sp>
-      <p:sp>
-        <p:nvSpPr>
-          <p:cNvPr id="4" name="Footer Placeholder 3"/>
-          <p:cNvSpPr>
-            <a:spLocks noGrp="1"/>
-          </p:cNvSpPr>
-          <p:nvPr>
-            <p:ph type="ftr" sz="quarter" idx="11"/>
-          </p:nvPr>
-        </p:nvSpPr>
-        <p:spPr/>
-        <p:txBody>
-          <a:bodyPr/>
-          <a:lstStyle/>
-          <a:p>
-            <a:r>
-              <a:rPr lang="en-US"/>
-              <a:t>Or Peretz</a:t>
-            </a:r>
-          </a:p>
-        </p:txBody>
-      </p:sp>
-      <p:sp>
-        <p:nvSpPr>
-          <p:cNvPr id="5" name="Slide Number Placeholder 4"/>
-          <p:cNvSpPr>
-            <a:spLocks noGrp="1"/>
-          </p:cNvSpPr>
-          <p:nvPr>
-            <p:ph type="sldNum" sz="quarter" idx="12"/>
-          </p:nvPr>
-        </p:nvSpPr>
-        <p:spPr/>
-        <p:txBody>
-          <a:bodyPr/>
-          <a:lstStyle/>
-          <a:p>
-            <a:fld id="{C1FF6DA9-008F-8B48-92A6-B652298478BF}" type="slidenum">
-              <a:rPr lang="en-US" smtClean="0"/>
-              <a:t>‹#›</a:t>
-            </a:fld>
-            <a:endParaRPr lang="en-US"/>
-          </a:p>
-        </p:txBody>
-      </p:sp>
-      <p:sp>
-        <p:nvSpPr>
-          <p:cNvPr id="6" name="Content Placeholder 2">
-            <a:extLst>
-              <a:ext uri="{FF2B5EF4-FFF2-40B4-BE49-F238E27FC236}">
-                <a16:creationId xmlns:a16="http://schemas.microsoft.com/office/drawing/2014/main" id="{E1D8F28D-D1D2-34A5-D88A-549DD7AD701A}"/>
-              </a:ext>
-            </a:extLst>
-          </p:cNvPr>
-          <p:cNvSpPr>
-            <a:spLocks noGrp="1"/>
-          </p:cNvSpPr>
-          <p:nvPr>
-            <p:ph idx="1" hasCustomPrompt="1"/>
-          </p:nvPr>
-        </p:nvSpPr>
-        <p:spPr>
-          <a:xfrm>
-            <a:off x="946768" y="1600201"/>
-            <a:ext cx="10635632" cy="4525963"/>
-          </a:xfrm>
-        </p:spPr>
-        <p:txBody>
-          <a:bodyPr>
-            <a:normAutofit/>
-          </a:bodyPr>
-          <a:lstStyle>
-            <a:lvl1pPr>
-              <a:defRPr sz="2800"/>
-            </a:lvl1pPr>
-            <a:lvl2pPr>
-              <a:defRPr sz="2400"/>
-            </a:lvl2pPr>
-            <a:lvl3pPr>
-              <a:defRPr sz="2000"/>
-            </a:lvl3pPr>
-            <a:lvl4pPr>
-              <a:defRPr sz="1800"/>
-            </a:lvl4pPr>
-            <a:lvl5pPr>
-              <a:defRPr sz="1800"/>
-            </a:lvl5pPr>
-          </a:lstStyle>
-          <a:p>
-            <a:pPr lvl="0"/>
-            <a:r>
-              <a:rPr lang="en-US" dirty="0"/>
-              <a:t>Click to edit Master text styles</a:t>
-            </a:r>
-          </a:p>
-          <a:p>
-            <a:pPr lvl="1"/>
-            <a:r>
-              <a:rPr lang="en-US" dirty="0"/>
-              <a:t>Second level</a:t>
-            </a:r>
-          </a:p>
-          <a:p>
-            <a:pPr lvl="2"/>
-            <a:r>
-              <a:rPr lang="en-US" dirty="0"/>
-              <a:t>Third level</a:t>
-            </a:r>
-          </a:p>
-          <a:p>
-            <a:pPr lvl="3"/>
-            <a:r>
-              <a:rPr lang="en-US" dirty="0"/>
-              <a:t>Fourth level</a:t>
-            </a:r>
-          </a:p>
-          <a:p>
-            <a:pPr lvl="4"/>
-            <a:r>
-              <a:rPr lang="en-US" dirty="0"/>
-              <a:t>Fifth level</a:t>
-            </a:r>
-          </a:p>
-        </p:txBody>
-      </p:sp>
-    </p:spTree>
-    <p:extLst>
-      <p:ext uri="{BB962C8B-B14F-4D97-AF65-F5344CB8AC3E}">
-        <p14:creationId xmlns:p14="http://schemas.microsoft.com/office/powerpoint/2010/main" val="727027711"/>
-      </p:ext>
-    </p:extLst>
-  </p:cSld>
-  <p:clrMapOvr>
-    <a:masterClrMapping/>
-  </p:clrMapOvr>
-</p:sldLayout>
-</file>
-
-<file path=ppt/slideLayouts/slideLayout7.xml><?xml version="1.0" encoding="utf-8"?>
-<p:sldLayout xmlns:a="http://schemas.openxmlformats.org/drawingml/2006/main" xmlns:r="http://schemas.openxmlformats.org/officeDocument/2006/relationships" xmlns:p="http://schemas.openxmlformats.org/presentationml/2006/main" preserve="1" userDrawn="1">
-  <p:cSld name="Blank">
-    <p:spTree>
-      <p:nvGrpSpPr>
-        <p:cNvPr id="1" name=""/>
-        <p:cNvGrpSpPr/>
-        <p:nvPr/>
-      </p:nvGrpSpPr>
-      <p:grpSpPr>
-        <a:xfrm>
-          <a:off x="0" y="0"/>
-          <a:ext cx="0" cy="0"/>
-          <a:chOff x="0" y="0"/>
-          <a:chExt cx="0" cy="0"/>
-        </a:xfrm>
-      </p:grpSpPr>
-      <p:sp>
-        <p:nvSpPr>
-          <p:cNvPr id="2" name="Date Placeholder 1"/>
-          <p:cNvSpPr>
-            <a:spLocks noGrp="1"/>
-          </p:cNvSpPr>
-          <p:nvPr>
-            <p:ph type="dt" sz="half" idx="10"/>
-          </p:nvPr>
-        </p:nvSpPr>
-        <p:spPr/>
-        <p:txBody>
-          <a:bodyPr/>
-          <a:lstStyle/>
-          <a:p>
-            <a:fld id="{E2C5D179-4B48-7641-AFA1-4656153FFCB8}" type="datetime9">
-              <a:rPr lang="he-IL" smtClean="0"/>
-              <a:t>9 פברואר, 2026</a:t>
-            </a:fld>
-            <a:endParaRPr lang="en-US"/>
-          </a:p>
-        </p:txBody>
-      </p:sp>
-      <p:sp>
-        <p:nvSpPr>
-          <p:cNvPr id="3" name="Footer Placeholder 2"/>
-          <p:cNvSpPr>
-            <a:spLocks noGrp="1"/>
-          </p:cNvSpPr>
-          <p:nvPr>
-            <p:ph type="ftr" sz="quarter" idx="11"/>
-          </p:nvPr>
-        </p:nvSpPr>
-        <p:spPr/>
-        <p:txBody>
-          <a:bodyPr/>
-          <a:lstStyle/>
-          <a:p>
-            <a:r>
-              <a:rPr lang="en-US"/>
-              <a:t>Or Peretz</a:t>
-            </a:r>
-          </a:p>
-        </p:txBody>
-      </p:sp>
-      <p:sp>
-        <p:nvSpPr>
-          <p:cNvPr id="4" name="Slide Number Placeholder 3"/>
-          <p:cNvSpPr>
-            <a:spLocks noGrp="1"/>
-          </p:cNvSpPr>
-          <p:nvPr>
-            <p:ph type="sldNum" sz="quarter" idx="12"/>
-          </p:nvPr>
-        </p:nvSpPr>
-        <p:spPr/>
-        <p:txBody>
-          <a:bodyPr/>
-          <a:lstStyle/>
-          <a:p>
-            <a:fld id="{C1FF6DA9-008F-8B48-92A6-B652298478BF}" type="slidenum">
-              <a:rPr lang="en-US" smtClean="0"/>
-              <a:t>‹#›</a:t>
-            </a:fld>
-            <a:endParaRPr lang="en-US"/>
-          </a:p>
-        </p:txBody>
-      </p:sp>
-      <p:sp>
-        <p:nvSpPr>
-          <p:cNvPr id="5" name="Content Placeholder 2">
-            <a:extLst>
-              <a:ext uri="{FF2B5EF4-FFF2-40B4-BE49-F238E27FC236}">
-                <a16:creationId xmlns:a16="http://schemas.microsoft.com/office/drawing/2014/main" id="{3F1439EE-8346-69C4-2D2A-C45C952E131C}"/>
-              </a:ext>
-            </a:extLst>
-          </p:cNvPr>
-          <p:cNvSpPr>
-            <a:spLocks noGrp="1"/>
-          </p:cNvSpPr>
-          <p:nvPr>
-            <p:ph idx="1" hasCustomPrompt="1"/>
-          </p:nvPr>
-        </p:nvSpPr>
-        <p:spPr>
-          <a:xfrm>
-            <a:off x="946768" y="1600201"/>
-            <a:ext cx="10635632" cy="4525963"/>
-          </a:xfrm>
-        </p:spPr>
-        <p:txBody>
-          <a:bodyPr>
-            <a:normAutofit/>
-          </a:bodyPr>
-          <a:lstStyle>
-            <a:lvl1pPr>
-              <a:defRPr sz="2800"/>
-            </a:lvl1pPr>
-            <a:lvl2pPr>
-              <a:defRPr sz="2400"/>
-            </a:lvl2pPr>
-            <a:lvl3pPr>
-              <a:defRPr sz="2000"/>
-            </a:lvl3pPr>
-            <a:lvl4pPr>
-              <a:defRPr sz="1800"/>
-            </a:lvl4pPr>
-            <a:lvl5pPr>
-              <a:defRPr sz="1800"/>
-            </a:lvl5pPr>
-          </a:lstStyle>
-          <a:p>
-            <a:pPr lvl="0"/>
-            <a:r>
-              <a:rPr lang="en-US" dirty="0"/>
-              <a:t>Click to edit Master text styles</a:t>
-            </a:r>
-          </a:p>
-          <a:p>
-            <a:pPr lvl="1"/>
-            <a:r>
-              <a:rPr lang="en-US" dirty="0"/>
-              <a:t>Second level</a:t>
-            </a:r>
-          </a:p>
-          <a:p>
-            <a:pPr lvl="2"/>
-            <a:r>
-              <a:rPr lang="en-US" dirty="0"/>
-              <a:t>Third level</a:t>
-            </a:r>
-          </a:p>
-          <a:p>
-            <a:pPr lvl="3"/>
-            <a:r>
-              <a:rPr lang="en-US" dirty="0"/>
-              <a:t>Fourth level</a:t>
-            </a:r>
-          </a:p>
-          <a:p>
-            <a:pPr lvl="4"/>
-            <a:r>
-              <a:rPr lang="en-US" dirty="0"/>
-              <a:t>Fifth level</a:t>
-            </a:r>
-          </a:p>
-        </p:txBody>
-      </p:sp>
-    </p:spTree>
-    <p:extLst>
-      <p:ext uri="{BB962C8B-B14F-4D97-AF65-F5344CB8AC3E}">
-        <p14:creationId xmlns:p14="http://schemas.microsoft.com/office/powerpoint/2010/main" val="1212999818"/>
-      </p:ext>
-    </p:extLst>
-  </p:cSld>
-  <p:clrMapOvr>
-    <a:masterClrMapping/>
-  </p:clrMapOvr>
-</p:sldLayout>
-</file>
-
-<file path=ppt/slideLayouts/slideLayout8.xml><?xml version="1.0" encoding="utf-8"?>
-<p:sldLayout xmlns:a="http://schemas.openxmlformats.org/drawingml/2006/main" xmlns:r="http://schemas.openxmlformats.org/officeDocument/2006/relationships" xmlns:p="http://schemas.openxmlformats.org/presentationml/2006/main" preserve="1" userDrawn="1">
-  <p:cSld name="Content with Caption">
-    <p:spTree>
-      <p:nvGrpSpPr>
-        <p:cNvPr id="1" name=""/>
-        <p:cNvGrpSpPr/>
-        <p:nvPr/>
-      </p:nvGrpSpPr>
-      <p:grpSpPr>
-        <a:xfrm>
-          <a:off x="0" y="0"/>
-          <a:ext cx="0" cy="0"/>
-          <a:chOff x="0" y="0"/>
-          <a:chExt cx="0" cy="0"/>
-        </a:xfrm>
-      </p:grpSpPr>
-      <p:sp>
-        <p:nvSpPr>
           <p:cNvPr id="5" name="Date Placeholder 4"/>
           <p:cNvSpPr>
             <a:spLocks noGrp="1"/>
@@ -2724,7 +2180,7 @@
           <a:p>
             <a:fld id="{B2D96A8D-C7E4-194A-BF0A-D552B24EBF94}" type="datetime9">
               <a:rPr lang="he-IL" smtClean="0"/>
-              <a:t>9 פברואר, 2026</a:t>
+              <a:t>10 פברואר, 2026</a:t>
             </a:fld>
             <a:endParaRPr lang="en-US"/>
           </a:p>
@@ -2962,7 +2418,7 @@
     </p:spTree>
     <p:extLst>
       <p:ext uri="{BB962C8B-B14F-4D97-AF65-F5344CB8AC3E}">
-        <p14:creationId xmlns:p14="http://schemas.microsoft.com/office/powerpoint/2010/main" val="1840726560"/>
+        <p14:creationId xmlns:p14="http://schemas.microsoft.com/office/powerpoint/2010/main" val="1943415282"/>
       </p:ext>
     </p:extLst>
   </p:cSld>
@@ -2972,9 +2428,9 @@
 </p:sldLayout>
 </file>
 
-<file path=ppt/slideLayouts/slideLayout9.xml><?xml version="1.0" encoding="utf-8"?>
-<p:sldLayout xmlns:a="http://schemas.openxmlformats.org/drawingml/2006/main" xmlns:r="http://schemas.openxmlformats.org/officeDocument/2006/relationships" xmlns:p="http://schemas.openxmlformats.org/presentationml/2006/main" type="picTx" preserve="1">
-  <p:cSld name="Picture with Caption">
+<file path=ppt/slideLayouts/slideLayout6.xml><?xml version="1.0" encoding="utf-8"?>
+<p:sldLayout xmlns:a="http://schemas.openxmlformats.org/drawingml/2006/main" xmlns:r="http://schemas.openxmlformats.org/officeDocument/2006/relationships" xmlns:p="http://schemas.openxmlformats.org/presentationml/2006/main" preserve="1" userDrawn="1">
+  <p:cSld name="text">
     <p:spTree>
       <p:nvGrpSpPr>
         <p:cNvPr id="1" name=""/>
@@ -2999,19 +2455,663 @@
             <p:ph type="title"/>
           </p:nvPr>
         </p:nvSpPr>
+        <p:spPr/>
+        <p:txBody>
+          <a:bodyPr/>
+          <a:lstStyle>
+            <a:lvl1pPr>
+              <a:defRPr/>
+            </a:lvl1pPr>
+          </a:lstStyle>
+          <a:p>
+            <a:r>
+              <a:rPr lang="en-US"/>
+              <a:t>Click to edit Master title style</a:t>
+            </a:r>
+          </a:p>
+        </p:txBody>
+      </p:sp>
+      <p:sp>
+        <p:nvSpPr>
+          <p:cNvPr id="7" name="Date Placeholder 6"/>
+          <p:cNvSpPr>
+            <a:spLocks noGrp="1"/>
+          </p:cNvSpPr>
+          <p:nvPr>
+            <p:ph type="dt" sz="half" idx="10"/>
+          </p:nvPr>
+        </p:nvSpPr>
+        <p:spPr/>
+        <p:txBody>
+          <a:bodyPr/>
+          <a:lstStyle/>
+          <a:p>
+            <a:fld id="{38CAE1C8-A9FA-924F-80DA-3B96C0343AF4}" type="datetime9">
+              <a:rPr lang="he-IL" smtClean="0"/>
+              <a:t>10 פברואר, 2026</a:t>
+            </a:fld>
+            <a:endParaRPr lang="en-US"/>
+          </a:p>
+        </p:txBody>
+      </p:sp>
+      <p:sp>
+        <p:nvSpPr>
+          <p:cNvPr id="8" name="Footer Placeholder 7"/>
+          <p:cNvSpPr>
+            <a:spLocks noGrp="1"/>
+          </p:cNvSpPr>
+          <p:nvPr>
+            <p:ph type="ftr" sz="quarter" idx="11"/>
+          </p:nvPr>
+        </p:nvSpPr>
+        <p:spPr/>
+        <p:txBody>
+          <a:bodyPr/>
+          <a:lstStyle/>
+          <a:p>
+            <a:r>
+              <a:rPr lang="en-US"/>
+              <a:t>Or Peretz</a:t>
+            </a:r>
+          </a:p>
+        </p:txBody>
+      </p:sp>
+      <p:sp>
+        <p:nvSpPr>
+          <p:cNvPr id="9" name="Slide Number Placeholder 8"/>
+          <p:cNvSpPr>
+            <a:spLocks noGrp="1"/>
+          </p:cNvSpPr>
+          <p:nvPr>
+            <p:ph type="sldNum" sz="quarter" idx="12"/>
+          </p:nvPr>
+        </p:nvSpPr>
+        <p:spPr/>
+        <p:txBody>
+          <a:bodyPr/>
+          <a:lstStyle/>
+          <a:p>
+            <a:fld id="{C1FF6DA9-008F-8B48-92A6-B652298478BF}" type="slidenum">
+              <a:rPr lang="en-US" smtClean="0"/>
+              <a:t>‹#›</a:t>
+            </a:fld>
+            <a:endParaRPr lang="en-US"/>
+          </a:p>
+        </p:txBody>
+      </p:sp>
+      <p:sp>
+        <p:nvSpPr>
+          <p:cNvPr id="3" name="Text Placeholder 2">
+            <a:extLst>
+              <a:ext uri="{FF2B5EF4-FFF2-40B4-BE49-F238E27FC236}">
+                <a16:creationId xmlns:a16="http://schemas.microsoft.com/office/drawing/2014/main" id="{EAF26D49-397F-B715-D50A-B77591A11199}"/>
+              </a:ext>
+            </a:extLst>
+          </p:cNvPr>
+          <p:cNvSpPr>
+            <a:spLocks noGrp="1"/>
+          </p:cNvSpPr>
+          <p:nvPr>
+            <p:ph idx="1"/>
+          </p:nvPr>
+        </p:nvSpPr>
         <p:spPr>
           <a:xfrm>
-            <a:off x="2389717" y="4800600"/>
-            <a:ext cx="7315200" cy="566738"/>
+            <a:off x="1481558" y="1600201"/>
+            <a:ext cx="8437945" cy="4525963"/>
+          </a:xfrm>
+          <a:prstGeom prst="rect">
+            <a:avLst/>
+          </a:prstGeom>
+          <a:ln>
+            <a:solidFill>
+              <a:schemeClr val="tx1"/>
+            </a:solidFill>
+          </a:ln>
+        </p:spPr>
+        <p:txBody>
+          <a:bodyPr vert="horz" lIns="91440" tIns="45720" rIns="91440" bIns="45720" rtlCol="0">
+            <a:normAutofit/>
+          </a:bodyPr>
+          <a:lstStyle/>
+          <a:p>
+            <a:pPr lvl="0"/>
+            <a:r>
+              <a:rPr lang="en-US" dirty="0"/>
+              <a:t>Click to edit Master text styles</a:t>
+            </a:r>
+          </a:p>
+          <a:p>
+            <a:pPr lvl="1"/>
+            <a:r>
+              <a:rPr lang="en-US" dirty="0"/>
+              <a:t>Second level</a:t>
+            </a:r>
+          </a:p>
+          <a:p>
+            <a:pPr lvl="2"/>
+            <a:r>
+              <a:rPr lang="en-US" dirty="0"/>
+              <a:t>Third level</a:t>
+            </a:r>
+          </a:p>
+          <a:p>
+            <a:pPr lvl="3"/>
+            <a:r>
+              <a:rPr lang="en-US" dirty="0"/>
+              <a:t>Fourth level</a:t>
+            </a:r>
+          </a:p>
+          <a:p>
+            <a:pPr lvl="4"/>
+            <a:r>
+              <a:rPr lang="en-US" dirty="0"/>
+              <a:t>Fifth level</a:t>
+            </a:r>
+          </a:p>
+        </p:txBody>
+      </p:sp>
+    </p:spTree>
+    <p:extLst>
+      <p:ext uri="{BB962C8B-B14F-4D97-AF65-F5344CB8AC3E}">
+        <p14:creationId xmlns:p14="http://schemas.microsoft.com/office/powerpoint/2010/main" val="990158736"/>
+      </p:ext>
+    </p:extLst>
+  </p:cSld>
+  <p:clrMapOvr>
+    <a:masterClrMapping/>
+  </p:clrMapOvr>
+</p:sldLayout>
+</file>
+
+<file path=ppt/slideLayouts/slideLayout7.xml><?xml version="1.0" encoding="utf-8"?>
+<p:sldLayout xmlns:a="http://schemas.openxmlformats.org/drawingml/2006/main" xmlns:r="http://schemas.openxmlformats.org/officeDocument/2006/relationships" xmlns:p="http://schemas.openxmlformats.org/presentationml/2006/main" preserve="1" userDrawn="1">
+  <p:cSld name="Title Only">
+    <p:spTree>
+      <p:nvGrpSpPr>
+        <p:cNvPr id="1" name=""/>
+        <p:cNvGrpSpPr/>
+        <p:nvPr/>
+      </p:nvGrpSpPr>
+      <p:grpSpPr>
+        <a:xfrm>
+          <a:off x="0" y="0"/>
+          <a:ext cx="0" cy="0"/>
+          <a:chOff x="0" y="0"/>
+          <a:chExt cx="0" cy="0"/>
+        </a:xfrm>
+      </p:grpSpPr>
+      <p:sp>
+        <p:nvSpPr>
+          <p:cNvPr id="2" name="Title 1"/>
+          <p:cNvSpPr>
+            <a:spLocks noGrp="1"/>
+          </p:cNvSpPr>
+          <p:nvPr>
+            <p:ph type="title"/>
+          </p:nvPr>
+        </p:nvSpPr>
+        <p:spPr/>
+        <p:txBody>
+          <a:bodyPr/>
+          <a:lstStyle/>
+          <a:p>
+            <a:r>
+              <a:rPr lang="en-US"/>
+              <a:t>Click to edit Master title style</a:t>
+            </a:r>
+          </a:p>
+        </p:txBody>
+      </p:sp>
+      <p:sp>
+        <p:nvSpPr>
+          <p:cNvPr id="3" name="Date Placeholder 2"/>
+          <p:cNvSpPr>
+            <a:spLocks noGrp="1"/>
+          </p:cNvSpPr>
+          <p:nvPr>
+            <p:ph type="dt" sz="half" idx="10"/>
+          </p:nvPr>
+        </p:nvSpPr>
+        <p:spPr/>
+        <p:txBody>
+          <a:bodyPr/>
+          <a:lstStyle/>
+          <a:p>
+            <a:fld id="{3DC92AE4-510D-3C40-B9B0-AA6693EED883}" type="datetime9">
+              <a:rPr lang="he-IL" smtClean="0"/>
+              <a:t>10 פברואר, 2026</a:t>
+            </a:fld>
+            <a:endParaRPr lang="en-US"/>
+          </a:p>
+        </p:txBody>
+      </p:sp>
+      <p:sp>
+        <p:nvSpPr>
+          <p:cNvPr id="4" name="Footer Placeholder 3"/>
+          <p:cNvSpPr>
+            <a:spLocks noGrp="1"/>
+          </p:cNvSpPr>
+          <p:nvPr>
+            <p:ph type="ftr" sz="quarter" idx="11"/>
+          </p:nvPr>
+        </p:nvSpPr>
+        <p:spPr/>
+        <p:txBody>
+          <a:bodyPr/>
+          <a:lstStyle/>
+          <a:p>
+            <a:r>
+              <a:rPr lang="en-US"/>
+              <a:t>Or Peretz</a:t>
+            </a:r>
+          </a:p>
+        </p:txBody>
+      </p:sp>
+      <p:sp>
+        <p:nvSpPr>
+          <p:cNvPr id="5" name="Slide Number Placeholder 4"/>
+          <p:cNvSpPr>
+            <a:spLocks noGrp="1"/>
+          </p:cNvSpPr>
+          <p:nvPr>
+            <p:ph type="sldNum" sz="quarter" idx="12"/>
+          </p:nvPr>
+        </p:nvSpPr>
+        <p:spPr/>
+        <p:txBody>
+          <a:bodyPr/>
+          <a:lstStyle/>
+          <a:p>
+            <a:fld id="{C1FF6DA9-008F-8B48-92A6-B652298478BF}" type="slidenum">
+              <a:rPr lang="en-US" smtClean="0"/>
+              <a:t>‹#›</a:t>
+            </a:fld>
+            <a:endParaRPr lang="en-US"/>
+          </a:p>
+        </p:txBody>
+      </p:sp>
+      <p:sp>
+        <p:nvSpPr>
+          <p:cNvPr id="6" name="Content Placeholder 2">
+            <a:extLst>
+              <a:ext uri="{FF2B5EF4-FFF2-40B4-BE49-F238E27FC236}">
+                <a16:creationId xmlns:a16="http://schemas.microsoft.com/office/drawing/2014/main" id="{E1D8F28D-D1D2-34A5-D88A-549DD7AD701A}"/>
+              </a:ext>
+            </a:extLst>
+          </p:cNvPr>
+          <p:cNvSpPr>
+            <a:spLocks noGrp="1"/>
+          </p:cNvSpPr>
+          <p:nvPr>
+            <p:ph idx="1" hasCustomPrompt="1"/>
+          </p:nvPr>
+        </p:nvSpPr>
+        <p:spPr>
+          <a:xfrm>
+            <a:off x="946768" y="1600201"/>
+            <a:ext cx="10635632" cy="4525963"/>
           </a:xfrm>
         </p:spPr>
         <p:txBody>
-          <a:bodyPr anchor="b"/>
+          <a:bodyPr>
+            <a:normAutofit/>
+          </a:bodyPr>
           <a:lstStyle>
-            <a:lvl1pPr algn="l">
-              <a:defRPr sz="2000" b="1"/>
+            <a:lvl1pPr>
+              <a:defRPr sz="2800"/>
             </a:lvl1pPr>
+            <a:lvl2pPr>
+              <a:defRPr sz="2400"/>
+            </a:lvl2pPr>
+            <a:lvl3pPr>
+              <a:defRPr sz="2000"/>
+            </a:lvl3pPr>
+            <a:lvl4pPr>
+              <a:defRPr sz="1800"/>
+            </a:lvl4pPr>
+            <a:lvl5pPr>
+              <a:defRPr sz="1800"/>
+            </a:lvl5pPr>
           </a:lstStyle>
+          <a:p>
+            <a:pPr lvl="0"/>
+            <a:r>
+              <a:rPr lang="en-US" dirty="0"/>
+              <a:t>Click to edit Master text styles</a:t>
+            </a:r>
+          </a:p>
+          <a:p>
+            <a:pPr lvl="1"/>
+            <a:r>
+              <a:rPr lang="en-US" dirty="0"/>
+              <a:t>Second level</a:t>
+            </a:r>
+          </a:p>
+          <a:p>
+            <a:pPr lvl="2"/>
+            <a:r>
+              <a:rPr lang="en-US" dirty="0"/>
+              <a:t>Third level</a:t>
+            </a:r>
+          </a:p>
+          <a:p>
+            <a:pPr lvl="3"/>
+            <a:r>
+              <a:rPr lang="en-US" dirty="0"/>
+              <a:t>Fourth level</a:t>
+            </a:r>
+          </a:p>
+          <a:p>
+            <a:pPr lvl="4"/>
+            <a:r>
+              <a:rPr lang="en-US" dirty="0"/>
+              <a:t>Fifth level</a:t>
+            </a:r>
+          </a:p>
+        </p:txBody>
+      </p:sp>
+    </p:spTree>
+    <p:extLst>
+      <p:ext uri="{BB962C8B-B14F-4D97-AF65-F5344CB8AC3E}">
+        <p14:creationId xmlns:p14="http://schemas.microsoft.com/office/powerpoint/2010/main" val="727027711"/>
+      </p:ext>
+    </p:extLst>
+  </p:cSld>
+  <p:clrMapOvr>
+    <a:masterClrMapping/>
+  </p:clrMapOvr>
+</p:sldLayout>
+</file>
+
+<file path=ppt/slideLayouts/slideLayout8.xml><?xml version="1.0" encoding="utf-8"?>
+<p:sldLayout xmlns:a="http://schemas.openxmlformats.org/drawingml/2006/main" xmlns:r="http://schemas.openxmlformats.org/officeDocument/2006/relationships" xmlns:p="http://schemas.openxmlformats.org/presentationml/2006/main" preserve="1" userDrawn="1">
+  <p:cSld name="Blank">
+    <p:spTree>
+      <p:nvGrpSpPr>
+        <p:cNvPr id="1" name=""/>
+        <p:cNvGrpSpPr/>
+        <p:nvPr/>
+      </p:nvGrpSpPr>
+      <p:grpSpPr>
+        <a:xfrm>
+          <a:off x="0" y="0"/>
+          <a:ext cx="0" cy="0"/>
+          <a:chOff x="0" y="0"/>
+          <a:chExt cx="0" cy="0"/>
+        </a:xfrm>
+      </p:grpSpPr>
+      <p:sp>
+        <p:nvSpPr>
+          <p:cNvPr id="2" name="Date Placeholder 1"/>
+          <p:cNvSpPr>
+            <a:spLocks noGrp="1"/>
+          </p:cNvSpPr>
+          <p:nvPr>
+            <p:ph type="dt" sz="half" idx="10"/>
+          </p:nvPr>
+        </p:nvSpPr>
+        <p:spPr/>
+        <p:txBody>
+          <a:bodyPr/>
+          <a:lstStyle/>
+          <a:p>
+            <a:fld id="{E2C5D179-4B48-7641-AFA1-4656153FFCB8}" type="datetime9">
+              <a:rPr lang="he-IL" smtClean="0"/>
+              <a:t>10 פברואר, 2026</a:t>
+            </a:fld>
+            <a:endParaRPr lang="en-US"/>
+          </a:p>
+        </p:txBody>
+      </p:sp>
+      <p:sp>
+        <p:nvSpPr>
+          <p:cNvPr id="3" name="Footer Placeholder 2"/>
+          <p:cNvSpPr>
+            <a:spLocks noGrp="1"/>
+          </p:cNvSpPr>
+          <p:nvPr>
+            <p:ph type="ftr" sz="quarter" idx="11"/>
+          </p:nvPr>
+        </p:nvSpPr>
+        <p:spPr/>
+        <p:txBody>
+          <a:bodyPr/>
+          <a:lstStyle/>
+          <a:p>
+            <a:r>
+              <a:rPr lang="en-US"/>
+              <a:t>Or Peretz</a:t>
+            </a:r>
+          </a:p>
+        </p:txBody>
+      </p:sp>
+      <p:sp>
+        <p:nvSpPr>
+          <p:cNvPr id="4" name="Slide Number Placeholder 3"/>
+          <p:cNvSpPr>
+            <a:spLocks noGrp="1"/>
+          </p:cNvSpPr>
+          <p:nvPr>
+            <p:ph type="sldNum" sz="quarter" idx="12"/>
+          </p:nvPr>
+        </p:nvSpPr>
+        <p:spPr/>
+        <p:txBody>
+          <a:bodyPr/>
+          <a:lstStyle/>
+          <a:p>
+            <a:fld id="{C1FF6DA9-008F-8B48-92A6-B652298478BF}" type="slidenum">
+              <a:rPr lang="en-US" smtClean="0"/>
+              <a:t>‹#›</a:t>
+            </a:fld>
+            <a:endParaRPr lang="en-US"/>
+          </a:p>
+        </p:txBody>
+      </p:sp>
+      <p:sp>
+        <p:nvSpPr>
+          <p:cNvPr id="5" name="Content Placeholder 2">
+            <a:extLst>
+              <a:ext uri="{FF2B5EF4-FFF2-40B4-BE49-F238E27FC236}">
+                <a16:creationId xmlns:a16="http://schemas.microsoft.com/office/drawing/2014/main" id="{3F1439EE-8346-69C4-2D2A-C45C952E131C}"/>
+              </a:ext>
+            </a:extLst>
+          </p:cNvPr>
+          <p:cNvSpPr>
+            <a:spLocks noGrp="1"/>
+          </p:cNvSpPr>
+          <p:nvPr>
+            <p:ph idx="1" hasCustomPrompt="1"/>
+          </p:nvPr>
+        </p:nvSpPr>
+        <p:spPr>
+          <a:xfrm>
+            <a:off x="946768" y="1600201"/>
+            <a:ext cx="10635632" cy="4525963"/>
+          </a:xfrm>
+        </p:spPr>
+        <p:txBody>
+          <a:bodyPr>
+            <a:normAutofit/>
+          </a:bodyPr>
+          <a:lstStyle>
+            <a:lvl1pPr>
+              <a:defRPr sz="2800"/>
+            </a:lvl1pPr>
+            <a:lvl2pPr>
+              <a:defRPr sz="2400"/>
+            </a:lvl2pPr>
+            <a:lvl3pPr>
+              <a:defRPr sz="2000"/>
+            </a:lvl3pPr>
+            <a:lvl4pPr>
+              <a:defRPr sz="1800"/>
+            </a:lvl4pPr>
+            <a:lvl5pPr>
+              <a:defRPr sz="1800"/>
+            </a:lvl5pPr>
+          </a:lstStyle>
+          <a:p>
+            <a:pPr lvl="0"/>
+            <a:r>
+              <a:rPr lang="en-US" dirty="0"/>
+              <a:t>Click to edit Master text styles</a:t>
+            </a:r>
+          </a:p>
+          <a:p>
+            <a:pPr lvl="1"/>
+            <a:r>
+              <a:rPr lang="en-US" dirty="0"/>
+              <a:t>Second level</a:t>
+            </a:r>
+          </a:p>
+          <a:p>
+            <a:pPr lvl="2"/>
+            <a:r>
+              <a:rPr lang="en-US" dirty="0"/>
+              <a:t>Third level</a:t>
+            </a:r>
+          </a:p>
+          <a:p>
+            <a:pPr lvl="3"/>
+            <a:r>
+              <a:rPr lang="en-US" dirty="0"/>
+              <a:t>Fourth level</a:t>
+            </a:r>
+          </a:p>
+          <a:p>
+            <a:pPr lvl="4"/>
+            <a:r>
+              <a:rPr lang="en-US" dirty="0"/>
+              <a:t>Fifth level</a:t>
+            </a:r>
+          </a:p>
+        </p:txBody>
+      </p:sp>
+    </p:spTree>
+    <p:extLst>
+      <p:ext uri="{BB962C8B-B14F-4D97-AF65-F5344CB8AC3E}">
+        <p14:creationId xmlns:p14="http://schemas.microsoft.com/office/powerpoint/2010/main" val="1212999818"/>
+      </p:ext>
+    </p:extLst>
+  </p:cSld>
+  <p:clrMapOvr>
+    <a:masterClrMapping/>
+  </p:clrMapOvr>
+</p:sldLayout>
+</file>
+
+<file path=ppt/slideLayouts/slideLayout9.xml><?xml version="1.0" encoding="utf-8"?>
+<p:sldLayout xmlns:a="http://schemas.openxmlformats.org/drawingml/2006/main" xmlns:r="http://schemas.openxmlformats.org/officeDocument/2006/relationships" xmlns:p="http://schemas.openxmlformats.org/presentationml/2006/main" preserve="1" userDrawn="1">
+  <p:cSld name="Content with Caption">
+    <p:spTree>
+      <p:nvGrpSpPr>
+        <p:cNvPr id="1" name=""/>
+        <p:cNvGrpSpPr/>
+        <p:nvPr/>
+      </p:nvGrpSpPr>
+      <p:grpSpPr>
+        <a:xfrm>
+          <a:off x="0" y="0"/>
+          <a:ext cx="0" cy="0"/>
+          <a:chOff x="0" y="0"/>
+          <a:chExt cx="0" cy="0"/>
+        </a:xfrm>
+      </p:grpSpPr>
+      <p:sp>
+        <p:nvSpPr>
+          <p:cNvPr id="5" name="Date Placeholder 4"/>
+          <p:cNvSpPr>
+            <a:spLocks noGrp="1"/>
+          </p:cNvSpPr>
+          <p:nvPr>
+            <p:ph type="dt" sz="half" idx="10"/>
+          </p:nvPr>
+        </p:nvSpPr>
+        <p:spPr/>
+        <p:txBody>
+          <a:bodyPr/>
+          <a:lstStyle/>
+          <a:p>
+            <a:fld id="{B2D96A8D-C7E4-194A-BF0A-D552B24EBF94}" type="datetime9">
+              <a:rPr lang="he-IL" smtClean="0"/>
+              <a:t>10 פברואר, 2026</a:t>
+            </a:fld>
+            <a:endParaRPr lang="en-US"/>
+          </a:p>
+        </p:txBody>
+      </p:sp>
+      <p:sp>
+        <p:nvSpPr>
+          <p:cNvPr id="6" name="Footer Placeholder 5"/>
+          <p:cNvSpPr>
+            <a:spLocks noGrp="1"/>
+          </p:cNvSpPr>
+          <p:nvPr>
+            <p:ph type="ftr" sz="quarter" idx="11"/>
+          </p:nvPr>
+        </p:nvSpPr>
+        <p:spPr/>
+        <p:txBody>
+          <a:bodyPr/>
+          <a:lstStyle/>
+          <a:p>
+            <a:r>
+              <a:rPr lang="en-US"/>
+              <a:t>Or Peretz</a:t>
+            </a:r>
+          </a:p>
+        </p:txBody>
+      </p:sp>
+      <p:sp>
+        <p:nvSpPr>
+          <p:cNvPr id="7" name="Slide Number Placeholder 6"/>
+          <p:cNvSpPr>
+            <a:spLocks noGrp="1"/>
+          </p:cNvSpPr>
+          <p:nvPr>
+            <p:ph type="sldNum" sz="quarter" idx="12"/>
+          </p:nvPr>
+        </p:nvSpPr>
+        <p:spPr/>
+        <p:txBody>
+          <a:bodyPr/>
+          <a:lstStyle/>
+          <a:p>
+            <a:fld id="{C1FF6DA9-008F-8B48-92A6-B652298478BF}" type="slidenum">
+              <a:rPr lang="en-US" smtClean="0"/>
+              <a:t>‹#›</a:t>
+            </a:fld>
+            <a:endParaRPr lang="en-US"/>
+          </a:p>
+        </p:txBody>
+      </p:sp>
+      <p:sp>
+        <p:nvSpPr>
+          <p:cNvPr id="9" name="Title 1">
+            <a:extLst>
+              <a:ext uri="{FF2B5EF4-FFF2-40B4-BE49-F238E27FC236}">
+                <a16:creationId xmlns:a16="http://schemas.microsoft.com/office/drawing/2014/main" id="{7F24627C-5938-5D06-969C-341161F72C9C}"/>
+              </a:ext>
+            </a:extLst>
+          </p:cNvPr>
+          <p:cNvSpPr>
+            <a:spLocks noGrp="1"/>
+          </p:cNvSpPr>
+          <p:nvPr>
+            <p:ph type="title"/>
+          </p:nvPr>
+        </p:nvSpPr>
+        <p:spPr>
+          <a:xfrm>
+            <a:off x="609600" y="274638"/>
+            <a:ext cx="10972800" cy="1143000"/>
+          </a:xfrm>
+        </p:spPr>
+        <p:txBody>
+          <a:bodyPr/>
+          <a:lstStyle/>
           <a:p>
             <a:r>
               <a:rPr lang="en-US"/>
@@ -3022,18 +3122,104 @@
       </p:sp>
       <p:sp>
         <p:nvSpPr>
-          <p:cNvPr id="3" name="Picture Placeholder 2"/>
-          <p:cNvSpPr>
-            <a:spLocks noGrp="1"/>
-          </p:cNvSpPr>
-          <p:nvPr>
-            <p:ph type="pic" idx="1"/>
+          <p:cNvPr id="2" name="Content Placeholder 2">
+            <a:extLst>
+              <a:ext uri="{FF2B5EF4-FFF2-40B4-BE49-F238E27FC236}">
+                <a16:creationId xmlns:a16="http://schemas.microsoft.com/office/drawing/2014/main" id="{63E56AFE-36F7-8DA5-652B-89A25DA319A7}"/>
+              </a:ext>
+            </a:extLst>
+          </p:cNvPr>
+          <p:cNvSpPr>
+            <a:spLocks noGrp="1"/>
+          </p:cNvSpPr>
+          <p:nvPr>
+            <p:ph idx="1" hasCustomPrompt="1"/>
           </p:nvPr>
         </p:nvSpPr>
         <p:spPr>
           <a:xfrm>
-            <a:off x="2389717" y="612775"/>
-            <a:ext cx="7315200" cy="4114800"/>
+            <a:off x="3957403" y="1417638"/>
+            <a:ext cx="7624997" cy="4357028"/>
+          </a:xfrm>
+        </p:spPr>
+        <p:txBody>
+          <a:bodyPr>
+            <a:normAutofit/>
+          </a:bodyPr>
+          <a:lstStyle>
+            <a:lvl1pPr>
+              <a:defRPr sz="2800"/>
+            </a:lvl1pPr>
+            <a:lvl2pPr>
+              <a:defRPr sz="2400"/>
+            </a:lvl2pPr>
+            <a:lvl3pPr>
+              <a:defRPr sz="2000"/>
+            </a:lvl3pPr>
+            <a:lvl4pPr>
+              <a:defRPr sz="1800"/>
+            </a:lvl4pPr>
+            <a:lvl5pPr>
+              <a:defRPr sz="1800"/>
+            </a:lvl5pPr>
+          </a:lstStyle>
+          <a:p>
+            <a:pPr lvl="0"/>
+            <a:r>
+              <a:rPr lang="en-US" dirty="0"/>
+              <a:t>Click to edit Master text styles</a:t>
+            </a:r>
+          </a:p>
+          <a:p>
+            <a:pPr lvl="1"/>
+            <a:r>
+              <a:rPr lang="en-US" dirty="0"/>
+              <a:t>Second level</a:t>
+            </a:r>
+          </a:p>
+          <a:p>
+            <a:pPr lvl="2"/>
+            <a:r>
+              <a:rPr lang="en-US" dirty="0"/>
+              <a:t>Third level</a:t>
+            </a:r>
+          </a:p>
+          <a:p>
+            <a:pPr lvl="3"/>
+            <a:r>
+              <a:rPr lang="en-US" dirty="0"/>
+              <a:t>Fourth level</a:t>
+            </a:r>
+          </a:p>
+          <a:p>
+            <a:pPr lvl="4"/>
+            <a:r>
+              <a:rPr lang="en-US" dirty="0"/>
+              <a:t>Fifth level</a:t>
+            </a:r>
+          </a:p>
+        </p:txBody>
+      </p:sp>
+      <p:sp>
+        <p:nvSpPr>
+          <p:cNvPr id="3" name="Text Placeholder 3">
+            <a:extLst>
+              <a:ext uri="{FF2B5EF4-FFF2-40B4-BE49-F238E27FC236}">
+                <a16:creationId xmlns:a16="http://schemas.microsoft.com/office/drawing/2014/main" id="{838FFFFD-68E9-C4E4-7764-523BAE32B83B}"/>
+              </a:ext>
+            </a:extLst>
+          </p:cNvPr>
+          <p:cNvSpPr>
+            <a:spLocks noGrp="1"/>
+          </p:cNvSpPr>
+          <p:nvPr>
+            <p:ph type="body" sz="half" idx="2" hasCustomPrompt="1"/>
+          </p:nvPr>
+        </p:nvSpPr>
+        <p:spPr>
+          <a:xfrm>
+            <a:off x="965200" y="1417638"/>
+            <a:ext cx="2844801" cy="4357028"/>
           </a:xfrm>
         </p:spPr>
         <p:txBody>
@@ -3041,68 +3227,7 @@
           <a:lstStyle>
             <a:lvl1pPr marL="0" indent="0">
               <a:buNone/>
-              <a:defRPr sz="3200"/>
-            </a:lvl1pPr>
-            <a:lvl2pPr marL="457200" indent="0">
-              <a:buNone/>
-              <a:defRPr sz="2800"/>
-            </a:lvl2pPr>
-            <a:lvl3pPr marL="914400" indent="0">
-              <a:buNone/>
-              <a:defRPr sz="2400"/>
-            </a:lvl3pPr>
-            <a:lvl4pPr marL="1371600" indent="0">
-              <a:buNone/>
-              <a:defRPr sz="2000"/>
-            </a:lvl4pPr>
-            <a:lvl5pPr marL="1828800" indent="0">
-              <a:buNone/>
-              <a:defRPr sz="2000"/>
-            </a:lvl5pPr>
-            <a:lvl6pPr marL="2286000" indent="0">
-              <a:buNone/>
-              <a:defRPr sz="2000"/>
-            </a:lvl6pPr>
-            <a:lvl7pPr marL="2743200" indent="0">
-              <a:buNone/>
-              <a:defRPr sz="2000"/>
-            </a:lvl7pPr>
-            <a:lvl8pPr marL="3200400" indent="0">
-              <a:buNone/>
-              <a:defRPr sz="2000"/>
-            </a:lvl8pPr>
-            <a:lvl9pPr marL="3657600" indent="0">
-              <a:buNone/>
-              <a:defRPr sz="2000"/>
-            </a:lvl9pPr>
-          </a:lstStyle>
-          <a:p>
-            <a:endParaRPr lang="en-US"/>
-          </a:p>
-        </p:txBody>
-      </p:sp>
-      <p:sp>
-        <p:nvSpPr>
-          <p:cNvPr id="4" name="Text Placeholder 3"/>
-          <p:cNvSpPr>
-            <a:spLocks noGrp="1"/>
-          </p:cNvSpPr>
-          <p:nvPr>
-            <p:ph type="body" sz="half" idx="2"/>
-          </p:nvPr>
-        </p:nvSpPr>
-        <p:spPr>
-          <a:xfrm>
-            <a:off x="2389717" y="5367338"/>
-            <a:ext cx="7315200" cy="804862"/>
-          </a:xfrm>
-        </p:spPr>
-        <p:txBody>
-          <a:bodyPr/>
-          <a:lstStyle>
-            <a:lvl1pPr marL="0" indent="0">
-              <a:buNone/>
-              <a:defRPr sz="1400"/>
+              <a:defRPr sz="2200"/>
             </a:lvl1pPr>
             <a:lvl2pPr marL="457200" indent="0">
               <a:buNone/>
@@ -3140,84 +3265,16 @@
           <a:p>
             <a:pPr lvl="0"/>
             <a:r>
-              <a:rPr lang="en-US"/>
+              <a:rPr lang="en-US" dirty="0"/>
               <a:t>Click to edit Master text styles</a:t>
             </a:r>
-          </a:p>
-        </p:txBody>
-      </p:sp>
-      <p:sp>
-        <p:nvSpPr>
-          <p:cNvPr id="5" name="Date Placeholder 4"/>
-          <p:cNvSpPr>
-            <a:spLocks noGrp="1"/>
-          </p:cNvSpPr>
-          <p:nvPr>
-            <p:ph type="dt" sz="half" idx="10"/>
-          </p:nvPr>
-        </p:nvSpPr>
-        <p:spPr/>
-        <p:txBody>
-          <a:bodyPr/>
-          <a:lstStyle/>
-          <a:p>
-            <a:fld id="{A12B2D52-0D9F-F345-8384-0DCA30BF1F04}" type="datetime9">
-              <a:rPr lang="he-IL" smtClean="0"/>
-              <a:t>9 פברואר, 2026</a:t>
-            </a:fld>
-            <a:endParaRPr lang="en-US"/>
-          </a:p>
-        </p:txBody>
-      </p:sp>
-      <p:sp>
-        <p:nvSpPr>
-          <p:cNvPr id="6" name="Footer Placeholder 5"/>
-          <p:cNvSpPr>
-            <a:spLocks noGrp="1"/>
-          </p:cNvSpPr>
-          <p:nvPr>
-            <p:ph type="ftr" sz="quarter" idx="11"/>
-          </p:nvPr>
-        </p:nvSpPr>
-        <p:spPr/>
-        <p:txBody>
-          <a:bodyPr/>
-          <a:lstStyle/>
-          <a:p>
-            <a:r>
-              <a:rPr lang="en-US"/>
-              <a:t>Or Peretz</a:t>
-            </a:r>
-          </a:p>
-        </p:txBody>
-      </p:sp>
-      <p:sp>
-        <p:nvSpPr>
-          <p:cNvPr id="7" name="Slide Number Placeholder 6"/>
-          <p:cNvSpPr>
-            <a:spLocks noGrp="1"/>
-          </p:cNvSpPr>
-          <p:nvPr>
-            <p:ph type="sldNum" sz="quarter" idx="12"/>
-          </p:nvPr>
-        </p:nvSpPr>
-        <p:spPr/>
-        <p:txBody>
-          <a:bodyPr/>
-          <a:lstStyle/>
-          <a:p>
-            <a:fld id="{C1FF6DA9-008F-8B48-92A6-B652298478BF}" type="slidenum">
-              <a:rPr lang="en-US" smtClean="0"/>
-              <a:t>‹#›</a:t>
-            </a:fld>
-            <a:endParaRPr lang="en-US"/>
           </a:p>
         </p:txBody>
       </p:sp>
     </p:spTree>
     <p:extLst>
       <p:ext uri="{BB962C8B-B14F-4D97-AF65-F5344CB8AC3E}">
-        <p14:creationId xmlns:p14="http://schemas.microsoft.com/office/powerpoint/2010/main" val="3889236939"/>
+        <p14:creationId xmlns:p14="http://schemas.microsoft.com/office/powerpoint/2010/main" val="1840726560"/>
       </p:ext>
     </p:extLst>
   </p:cSld>
@@ -3493,7 +3550,7 @@
           <a:p>
             <a:fld id="{3AA9E24A-D52C-CB4E-85D6-C52415601A2A}" type="datetime9">
               <a:rPr lang="he-IL" smtClean="0"/>
-              <a:t>9 פברואר, 2026</a:t>
+              <a:t>10 פברואר, 2026</a:t>
             </a:fld>
             <a:endParaRPr lang="en-US"/>
           </a:p>
@@ -3743,13 +3800,14 @@
     <p:sldLayoutId id="2147483650" r:id="rId2"/>
     <p:sldLayoutId id="2147483651" r:id="rId3"/>
     <p:sldLayoutId id="2147483652" r:id="rId4"/>
-    <p:sldLayoutId id="2147483653" r:id="rId5"/>
-    <p:sldLayoutId id="2147483654" r:id="rId6"/>
-    <p:sldLayoutId id="2147483655" r:id="rId7"/>
-    <p:sldLayoutId id="2147483656" r:id="rId8"/>
-    <p:sldLayoutId id="2147483657" r:id="rId9"/>
-    <p:sldLayoutId id="2147483658" r:id="rId10"/>
-    <p:sldLayoutId id="2147483659" r:id="rId11"/>
+    <p:sldLayoutId id="2147483660" r:id="rId5"/>
+    <p:sldLayoutId id="2147483653" r:id="rId6"/>
+    <p:sldLayoutId id="2147483654" r:id="rId7"/>
+    <p:sldLayoutId id="2147483655" r:id="rId8"/>
+    <p:sldLayoutId id="2147483656" r:id="rId9"/>
+    <p:sldLayoutId id="2147483657" r:id="rId10"/>
+    <p:sldLayoutId id="2147483658" r:id="rId11"/>
+    <p:sldLayoutId id="2147483659" r:id="rId12"/>
   </p:sldLayoutIdLst>
   <p:hf hdr="0" dt="0"/>
   <p:txStyles>
@@ -4543,10 +4601,15 @@
             <a:spLocks noGrp="1"/>
           </p:cNvSpPr>
           <p:nvPr>
-            <p:ph type="body" idx="1"/>
-          </p:nvPr>
-        </p:nvSpPr>
-        <p:spPr/>
+            <p:ph type="body" idx="4294967295"/>
+          </p:nvPr>
+        </p:nvSpPr>
+        <p:spPr>
+          <a:xfrm>
+            <a:off x="609600" y="1535113"/>
+            <a:ext cx="5386917" cy="639762"/>
+          </a:xfrm>
+        </p:spPr>
         <p:txBody>
           <a:bodyPr>
             <a:normAutofit/>
@@ -4564,10 +4627,15 @@
             <a:spLocks noGrp="1"/>
           </p:cNvSpPr>
           <p:nvPr>
-            <p:ph sz="half" idx="2"/>
-          </p:nvPr>
-        </p:nvSpPr>
-        <p:spPr/>
+            <p:ph sz="half" idx="4294967295"/>
+          </p:nvPr>
+        </p:nvSpPr>
+        <p:spPr>
+          <a:xfrm>
+            <a:off x="609600" y="2174875"/>
+            <a:ext cx="5386917" cy="3951288"/>
+          </a:xfrm>
+        </p:spPr>
         <p:txBody>
           <a:bodyPr/>
           <a:lstStyle/>
@@ -4583,10 +4651,15 @@
             <a:spLocks noGrp="1"/>
           </p:cNvSpPr>
           <p:nvPr>
-            <p:ph type="body" sz="quarter" idx="3"/>
-          </p:nvPr>
-        </p:nvSpPr>
-        <p:spPr/>
+            <p:ph type="body" sz="quarter" idx="4294967295"/>
+          </p:nvPr>
+        </p:nvSpPr>
+        <p:spPr>
+          <a:xfrm>
+            <a:off x="6193368" y="1535113"/>
+            <a:ext cx="5389033" cy="639762"/>
+          </a:xfrm>
+        </p:spPr>
         <p:txBody>
           <a:bodyPr>
             <a:normAutofit/>
@@ -4700,6 +4773,118 @@
       </p:grpSpPr>
       <p:sp>
         <p:nvSpPr>
+          <p:cNvPr id="2" name="כותרת 1">
+            <a:extLst>
+              <a:ext uri="{FF2B5EF4-FFF2-40B4-BE49-F238E27FC236}">
+                <a16:creationId xmlns:a16="http://schemas.microsoft.com/office/drawing/2014/main" id="{AB6A18BE-6ED1-6004-CF55-9D5921395456}"/>
+              </a:ext>
+            </a:extLst>
+          </p:cNvPr>
+          <p:cNvSpPr>
+            <a:spLocks noGrp="1"/>
+          </p:cNvSpPr>
+          <p:nvPr>
+            <p:ph type="title"/>
+          </p:nvPr>
+        </p:nvSpPr>
+        <p:spPr/>
+        <p:txBody>
+          <a:bodyPr/>
+          <a:lstStyle/>
+          <a:p>
+            <a:endParaRPr lang="he-IL"/>
+          </a:p>
+        </p:txBody>
+      </p:sp>
+      <p:sp>
+        <p:nvSpPr>
+          <p:cNvPr id="3" name="מציין מיקום של כותרת תחתונה 2">
+            <a:extLst>
+              <a:ext uri="{FF2B5EF4-FFF2-40B4-BE49-F238E27FC236}">
+                <a16:creationId xmlns:a16="http://schemas.microsoft.com/office/drawing/2014/main" id="{EEABDF48-DC8D-BFDE-AEB2-DCF1EC8A611B}"/>
+              </a:ext>
+            </a:extLst>
+          </p:cNvPr>
+          <p:cNvSpPr>
+            <a:spLocks noGrp="1"/>
+          </p:cNvSpPr>
+          <p:nvPr>
+            <p:ph type="ftr" sz="quarter" idx="11"/>
+          </p:nvPr>
+        </p:nvSpPr>
+        <p:spPr/>
+        <p:txBody>
+          <a:bodyPr/>
+          <a:lstStyle/>
+          <a:p>
+            <a:r>
+              <a:rPr lang="en-US"/>
+              <a:t>Or Peretz</a:t>
+            </a:r>
+          </a:p>
+        </p:txBody>
+      </p:sp>
+      <p:sp>
+        <p:nvSpPr>
+          <p:cNvPr id="4" name="מציין מיקום של מספר שקופית 3">
+            <a:extLst>
+              <a:ext uri="{FF2B5EF4-FFF2-40B4-BE49-F238E27FC236}">
+                <a16:creationId xmlns:a16="http://schemas.microsoft.com/office/drawing/2014/main" id="{AD429D21-3B08-1D7C-0020-C243FC9597FD}"/>
+              </a:ext>
+            </a:extLst>
+          </p:cNvPr>
+          <p:cNvSpPr>
+            <a:spLocks noGrp="1"/>
+          </p:cNvSpPr>
+          <p:nvPr>
+            <p:ph type="sldNum" sz="quarter" idx="12"/>
+          </p:nvPr>
+        </p:nvSpPr>
+        <p:spPr/>
+        <p:txBody>
+          <a:bodyPr/>
+          <a:lstStyle/>
+          <a:p>
+            <a:fld id="{C1FF6DA9-008F-8B48-92A6-B652298478BF}" type="slidenum">
+              <a:rPr lang="en-US" smtClean="0"/>
+              <a:t>6</a:t>
+            </a:fld>
+            <a:endParaRPr lang="en-US"/>
+          </a:p>
+        </p:txBody>
+      </p:sp>
+    </p:spTree>
+    <p:extLst>
+      <p:ext uri="{BB962C8B-B14F-4D97-AF65-F5344CB8AC3E}">
+        <p14:creationId xmlns:p14="http://schemas.microsoft.com/office/powerpoint/2010/main" val="2321852011"/>
+      </p:ext>
+    </p:extLst>
+  </p:cSld>
+  <p:clrMapOvr>
+    <a:masterClrMapping/>
+  </p:clrMapOvr>
+</p:sld>
+</file>
+
+<file path=ppt/slides/slide7.xml><?xml version="1.0" encoding="utf-8"?>
+<p:sld xmlns:a="http://schemas.openxmlformats.org/drawingml/2006/main" xmlns:r="http://schemas.openxmlformats.org/officeDocument/2006/relationships" xmlns:p="http://schemas.openxmlformats.org/presentationml/2006/main">
+  <p:cSld>
+    <p:spTree>
+      <p:nvGrpSpPr>
+        <p:cNvPr id="1" name=""/>
+        <p:cNvGrpSpPr/>
+        <p:nvPr/>
+      </p:nvGrpSpPr>
+      <p:grpSpPr>
+        <a:xfrm>
+          <a:off x="0" y="0"/>
+          <a:ext cx="0" cy="0"/>
+          <a:chOff x="0" y="0"/>
+          <a:chExt cx="0" cy="0"/>
+        </a:xfrm>
+      </p:grpSpPr>
+      <p:sp>
+        <p:nvSpPr>
           <p:cNvPr id="2" name="Title 1"/>
           <p:cNvSpPr>
             <a:spLocks noGrp="1"/>
@@ -4787,7 +4972,7 @@
           <a:p>
             <a:fld id="{C1FF6DA9-008F-8B48-92A6-B652298478BF}" type="slidenum">
               <a:rPr lang="en-US" smtClean="0"/>
-              <a:t>6</a:t>
+              <a:t>7</a:t>
             </a:fld>
             <a:endParaRPr lang="en-US"/>
           </a:p>

--- a/reference.pptx
+++ b/reference.pptx
@@ -5,10 +5,10 @@
     <p:sldMasterId id="2147483648" r:id="rId1"/>
   </p:sldMasterIdLst>
   <p:notesMasterIdLst>
-    <p:notesMasterId r:id="rId9"/>
+    <p:notesMasterId r:id="rId11"/>
   </p:notesMasterIdLst>
   <p:handoutMasterIdLst>
-    <p:handoutMasterId r:id="rId10"/>
+    <p:handoutMasterId r:id="rId12"/>
   </p:handoutMasterIdLst>
   <p:sldIdLst>
     <p:sldId id="256" r:id="rId2"/>
@@ -18,6 +18,8 @@
     <p:sldId id="260" r:id="rId6"/>
     <p:sldId id="262" r:id="rId7"/>
     <p:sldId id="261" r:id="rId8"/>
+    <p:sldId id="263" r:id="rId9"/>
+    <p:sldId id="264" r:id="rId10"/>
   </p:sldIdLst>
   <p:sldSz cx="12192000" cy="6858000"/>
   <p:notesSz cx="6858000" cy="9144000"/>
@@ -232,7 +234,7 @@
           <a:p>
             <a:fld id="{DD925C12-D9C3-4748-B45F-0C5A2B3C54BA}" type="datetimeFigureOut">
               <a:rPr lang="he-IL" smtClean="0"/>
-              <a:t>כ"ג.שבט.תשפ"ו</a:t>
+              <a:t>כ"א.אייר.תשפ"ו</a:t>
             </a:fld>
             <a:endParaRPr lang="he-IL"/>
           </a:p>
@@ -409,7 +411,7 @@
           <a:p>
             <a:fld id="{CAD1E319-67F0-2846-8742-18CC0BED76BD}" type="datetimeFigureOut">
               <a:rPr lang="he-IL" smtClean="0"/>
-              <a:t>כ"ג.שבט.תשפ"ו</a:t>
+              <a:t>כ"א.אייר.תשפ"ו</a:t>
             </a:fld>
             <a:endParaRPr lang="he-IL"/>
           </a:p>
@@ -859,7 +861,7 @@
           <a:p>
             <a:fld id="{A3964B5F-BAD9-9946-9D71-AB5C763DA70C}" type="datetime9">
               <a:rPr lang="he-IL" smtClean="0"/>
-              <a:t>10 פברואר, 2026</a:t>
+              <a:t>8 מאי, 2026</a:t>
             </a:fld>
             <a:endParaRPr lang="en-US"/>
           </a:p>
@@ -924,6 +926,288 @@
 </file>
 
 <file path=ppt/slideLayouts/slideLayout10.xml><?xml version="1.0" encoding="utf-8"?>
+<p:sldLayout xmlns:a="http://schemas.openxmlformats.org/drawingml/2006/main" xmlns:r="http://schemas.openxmlformats.org/officeDocument/2006/relationships" xmlns:p="http://schemas.openxmlformats.org/presentationml/2006/main" preserve="1" userDrawn="1">
+  <p:cSld name="Content with Caption">
+    <p:spTree>
+      <p:nvGrpSpPr>
+        <p:cNvPr id="1" name=""/>
+        <p:cNvGrpSpPr/>
+        <p:nvPr/>
+      </p:nvGrpSpPr>
+      <p:grpSpPr>
+        <a:xfrm>
+          <a:off x="0" y="0"/>
+          <a:ext cx="0" cy="0"/>
+          <a:chOff x="0" y="0"/>
+          <a:chExt cx="0" cy="0"/>
+        </a:xfrm>
+      </p:grpSpPr>
+      <p:sp>
+        <p:nvSpPr>
+          <p:cNvPr id="5" name="Date Placeholder 4"/>
+          <p:cNvSpPr>
+            <a:spLocks noGrp="1"/>
+          </p:cNvSpPr>
+          <p:nvPr>
+            <p:ph type="dt" sz="half" idx="10"/>
+          </p:nvPr>
+        </p:nvSpPr>
+        <p:spPr/>
+        <p:txBody>
+          <a:bodyPr/>
+          <a:lstStyle/>
+          <a:p>
+            <a:fld id="{B2D96A8D-C7E4-194A-BF0A-D552B24EBF94}" type="datetime9">
+              <a:rPr lang="he-IL" smtClean="0"/>
+              <a:t>8 מאי, 2026</a:t>
+            </a:fld>
+            <a:endParaRPr lang="en-US"/>
+          </a:p>
+        </p:txBody>
+      </p:sp>
+      <p:sp>
+        <p:nvSpPr>
+          <p:cNvPr id="6" name="Footer Placeholder 5"/>
+          <p:cNvSpPr>
+            <a:spLocks noGrp="1"/>
+          </p:cNvSpPr>
+          <p:nvPr>
+            <p:ph type="ftr" sz="quarter" idx="11"/>
+          </p:nvPr>
+        </p:nvSpPr>
+        <p:spPr/>
+        <p:txBody>
+          <a:bodyPr/>
+          <a:lstStyle/>
+          <a:p>
+            <a:r>
+              <a:rPr lang="en-US"/>
+              <a:t>Or Peretz</a:t>
+            </a:r>
+          </a:p>
+        </p:txBody>
+      </p:sp>
+      <p:sp>
+        <p:nvSpPr>
+          <p:cNvPr id="7" name="Slide Number Placeholder 6"/>
+          <p:cNvSpPr>
+            <a:spLocks noGrp="1"/>
+          </p:cNvSpPr>
+          <p:nvPr>
+            <p:ph type="sldNum" sz="quarter" idx="12"/>
+          </p:nvPr>
+        </p:nvSpPr>
+        <p:spPr/>
+        <p:txBody>
+          <a:bodyPr/>
+          <a:lstStyle/>
+          <a:p>
+            <a:fld id="{C1FF6DA9-008F-8B48-92A6-B652298478BF}" type="slidenum">
+              <a:rPr lang="en-US" smtClean="0"/>
+              <a:t>‹#›</a:t>
+            </a:fld>
+            <a:endParaRPr lang="en-US"/>
+          </a:p>
+        </p:txBody>
+      </p:sp>
+      <p:sp>
+        <p:nvSpPr>
+          <p:cNvPr id="9" name="Title 1">
+            <a:extLst>
+              <a:ext uri="{FF2B5EF4-FFF2-40B4-BE49-F238E27FC236}">
+                <a16:creationId xmlns:a16="http://schemas.microsoft.com/office/drawing/2014/main" id="{7F24627C-5938-5D06-969C-341161F72C9C}"/>
+              </a:ext>
+            </a:extLst>
+          </p:cNvPr>
+          <p:cNvSpPr>
+            <a:spLocks noGrp="1"/>
+          </p:cNvSpPr>
+          <p:nvPr>
+            <p:ph type="title"/>
+          </p:nvPr>
+        </p:nvSpPr>
+        <p:spPr>
+          <a:xfrm>
+            <a:off x="609600" y="274638"/>
+            <a:ext cx="10972800" cy="1143000"/>
+          </a:xfrm>
+        </p:spPr>
+        <p:txBody>
+          <a:bodyPr/>
+          <a:lstStyle/>
+          <a:p>
+            <a:r>
+              <a:rPr lang="en-US"/>
+              <a:t>Click to edit Master title style</a:t>
+            </a:r>
+          </a:p>
+        </p:txBody>
+      </p:sp>
+      <p:sp>
+        <p:nvSpPr>
+          <p:cNvPr id="4" name="Content Placeholder 2">
+            <a:extLst>
+              <a:ext uri="{FF2B5EF4-FFF2-40B4-BE49-F238E27FC236}">
+                <a16:creationId xmlns:a16="http://schemas.microsoft.com/office/drawing/2014/main" id="{8BE080CD-5224-9141-7E29-FC08A3B3FD70}"/>
+              </a:ext>
+            </a:extLst>
+          </p:cNvPr>
+          <p:cNvSpPr>
+            <a:spLocks noGrp="1"/>
+          </p:cNvSpPr>
+          <p:nvPr>
+            <p:ph idx="1" hasCustomPrompt="1"/>
+          </p:nvPr>
+        </p:nvSpPr>
+        <p:spPr>
+          <a:xfrm>
+            <a:off x="1362076" y="3438525"/>
+            <a:ext cx="8934450" cy="2345666"/>
+          </a:xfrm>
+        </p:spPr>
+        <p:txBody>
+          <a:bodyPr>
+            <a:normAutofit/>
+          </a:bodyPr>
+          <a:lstStyle>
+            <a:lvl1pPr>
+              <a:defRPr sz="2800"/>
+            </a:lvl1pPr>
+            <a:lvl2pPr>
+              <a:defRPr sz="2400"/>
+            </a:lvl2pPr>
+            <a:lvl3pPr>
+              <a:defRPr sz="2000"/>
+            </a:lvl3pPr>
+            <a:lvl4pPr>
+              <a:defRPr sz="1800"/>
+            </a:lvl4pPr>
+            <a:lvl5pPr>
+              <a:defRPr sz="1800"/>
+            </a:lvl5pPr>
+          </a:lstStyle>
+          <a:p>
+            <a:pPr lvl="0"/>
+            <a:r>
+              <a:rPr lang="en-US" dirty="0"/>
+              <a:t>Click to edit Master text styles</a:t>
+            </a:r>
+          </a:p>
+          <a:p>
+            <a:pPr lvl="1"/>
+            <a:r>
+              <a:rPr lang="en-US" dirty="0"/>
+              <a:t>Second level</a:t>
+            </a:r>
+          </a:p>
+          <a:p>
+            <a:pPr lvl="2"/>
+            <a:r>
+              <a:rPr lang="en-US" dirty="0"/>
+              <a:t>Third level</a:t>
+            </a:r>
+          </a:p>
+          <a:p>
+            <a:pPr lvl="3"/>
+            <a:r>
+              <a:rPr lang="en-US" dirty="0"/>
+              <a:t>Fourth level</a:t>
+            </a:r>
+          </a:p>
+          <a:p>
+            <a:pPr lvl="4"/>
+            <a:r>
+              <a:rPr lang="en-US" dirty="0"/>
+              <a:t>Fifth level</a:t>
+            </a:r>
+          </a:p>
+        </p:txBody>
+      </p:sp>
+      <p:sp>
+        <p:nvSpPr>
+          <p:cNvPr id="8" name="Text Placeholder 3">
+            <a:extLst>
+              <a:ext uri="{FF2B5EF4-FFF2-40B4-BE49-F238E27FC236}">
+                <a16:creationId xmlns:a16="http://schemas.microsoft.com/office/drawing/2014/main" id="{0A904EEE-C9D3-E47E-C69D-A4A1BC1D9F2D}"/>
+              </a:ext>
+            </a:extLst>
+          </p:cNvPr>
+          <p:cNvSpPr>
+            <a:spLocks noGrp="1"/>
+          </p:cNvSpPr>
+          <p:nvPr>
+            <p:ph type="body" sz="half" idx="2" hasCustomPrompt="1"/>
+          </p:nvPr>
+        </p:nvSpPr>
+        <p:spPr>
+          <a:xfrm>
+            <a:off x="1165225" y="1579563"/>
+            <a:ext cx="9064625" cy="4357028"/>
+          </a:xfrm>
+        </p:spPr>
+        <p:txBody>
+          <a:bodyPr/>
+          <a:lstStyle>
+            <a:lvl1pPr marL="0" indent="0">
+              <a:buNone/>
+              <a:defRPr sz="2400"/>
+            </a:lvl1pPr>
+            <a:lvl2pPr marL="457200" indent="0">
+              <a:buNone/>
+              <a:defRPr sz="1200"/>
+            </a:lvl2pPr>
+            <a:lvl3pPr marL="914400" indent="0">
+              <a:buNone/>
+              <a:defRPr sz="1000"/>
+            </a:lvl3pPr>
+            <a:lvl4pPr marL="1371600" indent="0">
+              <a:buNone/>
+              <a:defRPr sz="900"/>
+            </a:lvl4pPr>
+            <a:lvl5pPr marL="1828800" indent="0">
+              <a:buNone/>
+              <a:defRPr sz="900"/>
+            </a:lvl5pPr>
+            <a:lvl6pPr marL="2286000" indent="0">
+              <a:buNone/>
+              <a:defRPr sz="900"/>
+            </a:lvl6pPr>
+            <a:lvl7pPr marL="2743200" indent="0">
+              <a:buNone/>
+              <a:defRPr sz="900"/>
+            </a:lvl7pPr>
+            <a:lvl8pPr marL="3200400" indent="0">
+              <a:buNone/>
+              <a:defRPr sz="900"/>
+            </a:lvl8pPr>
+            <a:lvl9pPr marL="3657600" indent="0">
+              <a:buNone/>
+              <a:defRPr sz="900"/>
+            </a:lvl9pPr>
+          </a:lstStyle>
+          <a:p>
+            <a:pPr lvl="0"/>
+            <a:r>
+              <a:rPr lang="en-US" dirty="0"/>
+              <a:t>Click to edit Master text styles</a:t>
+            </a:r>
+          </a:p>
+        </p:txBody>
+      </p:sp>
+    </p:spTree>
+    <p:extLst>
+      <p:ext uri="{BB962C8B-B14F-4D97-AF65-F5344CB8AC3E}">
+        <p14:creationId xmlns:p14="http://schemas.microsoft.com/office/powerpoint/2010/main" val="1840726560"/>
+      </p:ext>
+    </p:extLst>
+  </p:cSld>
+  <p:clrMapOvr>
+    <a:masterClrMapping/>
+  </p:clrMapOvr>
+</p:sldLayout>
+</file>
+
+<file path=ppt/slideLayouts/slideLayout11.xml><?xml version="1.0" encoding="utf-8"?>
 <p:sldLayout xmlns:a="http://schemas.openxmlformats.org/drawingml/2006/main" xmlns:r="http://schemas.openxmlformats.org/officeDocument/2006/relationships" xmlns:p="http://schemas.openxmlformats.org/presentationml/2006/main" type="picTx" preserve="1">
   <p:cSld name="Picture with Caption">
     <p:spTree>
@@ -1114,7 +1398,7 @@
           <a:p>
             <a:fld id="{A12B2D52-0D9F-F345-8384-0DCA30BF1F04}" type="datetime9">
               <a:rPr lang="he-IL" smtClean="0"/>
-              <a:t>10 פברואר, 2026</a:t>
+              <a:t>8 מאי, 2026</a:t>
             </a:fld>
             <a:endParaRPr lang="en-US"/>
           </a:p>
@@ -1178,7 +1462,7 @@
 </p:sldLayout>
 </file>
 
-<file path=ppt/slideLayouts/slideLayout11.xml><?xml version="1.0" encoding="utf-8"?>
+<file path=ppt/slideLayouts/slideLayout12.xml><?xml version="1.0" encoding="utf-8"?>
 <p:sldLayout xmlns:a="http://schemas.openxmlformats.org/drawingml/2006/main" xmlns:r="http://schemas.openxmlformats.org/officeDocument/2006/relationships" xmlns:p="http://schemas.openxmlformats.org/presentationml/2006/main" type="vertTx" preserve="1">
   <p:cSld name="Title and Vertical Text">
     <p:spTree>
@@ -1285,7 +1569,7 @@
           <a:p>
             <a:fld id="{6A744ED6-1944-D14D-91B5-FC6036DE393D}" type="datetime9">
               <a:rPr lang="he-IL" smtClean="0"/>
-              <a:t>10 פברואר, 2026</a:t>
+              <a:t>8 מאי, 2026</a:t>
             </a:fld>
             <a:endParaRPr lang="en-US"/>
           </a:p>
@@ -1349,7 +1633,7 @@
 </p:sldLayout>
 </file>
 
-<file path=ppt/slideLayouts/slideLayout12.xml><?xml version="1.0" encoding="utf-8"?>
+<file path=ppt/slideLayouts/slideLayout13.xml><?xml version="1.0" encoding="utf-8"?>
 <p:sldLayout xmlns:a="http://schemas.openxmlformats.org/drawingml/2006/main" xmlns:r="http://schemas.openxmlformats.org/officeDocument/2006/relationships" xmlns:p="http://schemas.openxmlformats.org/presentationml/2006/main" type="vertTitleAndTx" preserve="1">
   <p:cSld name="Vertical Title and Text">
     <p:spTree>
@@ -1466,7 +1750,7 @@
           <a:p>
             <a:fld id="{37268E4D-FFEC-474C-BD1C-299FD021CBA4}" type="datetime9">
               <a:rPr lang="he-IL" smtClean="0"/>
-              <a:t>10 פברואר, 2026</a:t>
+              <a:t>8 מאי, 2026</a:t>
             </a:fld>
             <a:endParaRPr lang="en-US"/>
           </a:p>
@@ -1531,7 +1815,7 @@
 </file>
 
 <file path=ppt/slideLayouts/slideLayout2.xml><?xml version="1.0" encoding="utf-8"?>
-<p:sldLayout xmlns:a="http://schemas.openxmlformats.org/drawingml/2006/main" xmlns:r="http://schemas.openxmlformats.org/officeDocument/2006/relationships" xmlns:p="http://schemas.openxmlformats.org/presentationml/2006/main" type="obj" preserve="1">
+<p:sldLayout xmlns:a="http://schemas.openxmlformats.org/drawingml/2006/main" xmlns:r="http://schemas.openxmlformats.org/officeDocument/2006/relationships" xmlns:p="http://schemas.openxmlformats.org/presentationml/2006/main" preserve="1" userDrawn="1">
   <p:cSld name="Title and Content">
     <p:spTree>
       <p:nvGrpSpPr>
@@ -1659,7 +1943,7 @@
           <a:p>
             <a:fld id="{29E1EEA0-9609-584F-90F2-46E4F93E52CD}" type="datetime9">
               <a:rPr lang="he-IL" smtClean="0"/>
-              <a:t>10 פברואר, 2026</a:t>
+              <a:t>8 מאי, 2026</a:t>
             </a:fld>
             <a:endParaRPr lang="en-US"/>
           </a:p>
@@ -1757,7 +2041,7 @@
           <a:p>
             <a:fld id="{BDCA6A5E-CA21-6B4F-9DE7-1A275F321E49}" type="datetime9">
               <a:rPr lang="he-IL" smtClean="0"/>
-              <a:t>10 פברואר, 2026</a:t>
+              <a:t>8 מאי, 2026</a:t>
             </a:fld>
             <a:endParaRPr lang="en-US"/>
           </a:p>
@@ -1859,7 +2143,7 @@
 </file>
 
 <file path=ppt/slideLayouts/slideLayout4.xml><?xml version="1.0" encoding="utf-8"?>
-<p:sldLayout xmlns:a="http://schemas.openxmlformats.org/drawingml/2006/main" xmlns:r="http://schemas.openxmlformats.org/officeDocument/2006/relationships" xmlns:p="http://schemas.openxmlformats.org/presentationml/2006/main" type="twoObj" preserve="1">
+<p:sldLayout xmlns:a="http://schemas.openxmlformats.org/drawingml/2006/main" xmlns:r="http://schemas.openxmlformats.org/officeDocument/2006/relationships" xmlns:p="http://schemas.openxmlformats.org/presentationml/2006/main" preserve="1" userDrawn="1">
   <p:cSld name="Two Content">
     <p:spTree>
       <p:nvGrpSpPr>
@@ -1910,7 +2194,7 @@
         <p:spPr>
           <a:xfrm>
             <a:off x="956840" y="1600201"/>
-            <a:ext cx="6601428" cy="4525963"/>
+            <a:ext cx="10625560" cy="4525963"/>
           </a:xfrm>
         </p:spPr>
         <p:txBody>
@@ -1983,90 +2267,6 @@
       </p:sp>
       <p:sp>
         <p:nvSpPr>
-          <p:cNvPr id="4" name="Content Placeholder 3"/>
-          <p:cNvSpPr>
-            <a:spLocks noGrp="1"/>
-          </p:cNvSpPr>
-          <p:nvPr>
-            <p:ph sz="half" idx="2"/>
-          </p:nvPr>
-        </p:nvSpPr>
-        <p:spPr>
-          <a:xfrm>
-            <a:off x="5717894" y="2569580"/>
-            <a:ext cx="5864506" cy="3556584"/>
-          </a:xfrm>
-        </p:spPr>
-        <p:txBody>
-          <a:bodyPr/>
-          <a:lstStyle>
-            <a:lvl1pPr>
-              <a:defRPr sz="2800"/>
-            </a:lvl1pPr>
-            <a:lvl2pPr>
-              <a:defRPr sz="2400"/>
-            </a:lvl2pPr>
-            <a:lvl3pPr>
-              <a:defRPr sz="2000"/>
-            </a:lvl3pPr>
-            <a:lvl4pPr>
-              <a:defRPr sz="1800"/>
-            </a:lvl4pPr>
-            <a:lvl5pPr>
-              <a:defRPr sz="1800"/>
-            </a:lvl5pPr>
-            <a:lvl6pPr>
-              <a:defRPr sz="1800"/>
-            </a:lvl6pPr>
-            <a:lvl7pPr>
-              <a:defRPr sz="1800"/>
-            </a:lvl7pPr>
-            <a:lvl8pPr>
-              <a:defRPr sz="1800"/>
-            </a:lvl8pPr>
-            <a:lvl9pPr>
-              <a:defRPr sz="1800"/>
-            </a:lvl9pPr>
-          </a:lstStyle>
-          <a:p>
-            <a:pPr lvl="0"/>
-            <a:r>
-              <a:rPr lang="en-US" dirty="0"/>
-              <a:t>Click to edit Master text styles</a:t>
-            </a:r>
-          </a:p>
-          <a:p>
-            <a:pPr lvl="1"/>
-            <a:r>
-              <a:rPr lang="en-US" dirty="0"/>
-              <a:t>Second level</a:t>
-            </a:r>
-          </a:p>
-          <a:p>
-            <a:pPr lvl="2"/>
-            <a:r>
-              <a:rPr lang="en-US" dirty="0"/>
-              <a:t>Third level</a:t>
-            </a:r>
-          </a:p>
-          <a:p>
-            <a:pPr lvl="3"/>
-            <a:r>
-              <a:rPr lang="en-US" dirty="0"/>
-              <a:t>Fourth level</a:t>
-            </a:r>
-          </a:p>
-          <a:p>
-            <a:pPr lvl="4"/>
-            <a:r>
-              <a:rPr lang="en-US" dirty="0"/>
-              <a:t>Fifth level</a:t>
-            </a:r>
-          </a:p>
-        </p:txBody>
-      </p:sp>
-      <p:sp>
-        <p:nvSpPr>
           <p:cNvPr id="5" name="Date Placeholder 4"/>
           <p:cNvSpPr>
             <a:spLocks noGrp="1"/>
@@ -2082,7 +2282,7 @@
           <a:p>
             <a:fld id="{AE3C6960-90E0-EA41-937B-E68D4C6A0841}" type="datetime9">
               <a:rPr lang="he-IL" smtClean="0"/>
-              <a:t>10 פברואר, 2026</a:t>
+              <a:t>8 מאי, 2026</a:t>
             </a:fld>
             <a:endParaRPr lang="en-US"/>
           </a:p>
@@ -2180,7 +2380,7 @@
           <a:p>
             <a:fld id="{B2D96A8D-C7E4-194A-BF0A-D552B24EBF94}" type="datetime9">
               <a:rPr lang="he-IL" smtClean="0"/>
-              <a:t>10 פברואר, 2026</a:t>
+              <a:t>8 מאי, 2026</a:t>
             </a:fld>
             <a:endParaRPr lang="en-US"/>
           </a:p>
@@ -2282,8 +2482,8 @@
         </p:nvSpPr>
         <p:spPr>
           <a:xfrm>
-            <a:off x="3957403" y="1417638"/>
-            <a:ext cx="7624997" cy="4357028"/>
+            <a:off x="1362076" y="3438525"/>
+            <a:ext cx="8934450" cy="2345666"/>
           </a:xfrm>
         </p:spPr>
         <p:txBody>
@@ -2362,8 +2562,8 @@
         </p:nvSpPr>
         <p:spPr>
           <a:xfrm>
-            <a:off x="965200" y="1417638"/>
-            <a:ext cx="2844801" cy="4357028"/>
+            <a:off x="1165225" y="1579563"/>
+            <a:ext cx="9064625" cy="4357028"/>
           </a:xfrm>
         </p:spPr>
         <p:txBody>
@@ -2371,7 +2571,7 @@
           <a:lstStyle>
             <a:lvl1pPr marL="0" indent="0">
               <a:buNone/>
-              <a:defRPr sz="2200"/>
+              <a:defRPr sz="2400"/>
             </a:lvl1pPr>
             <a:lvl2pPr marL="457200" indent="0">
               <a:buNone/>
@@ -2488,7 +2688,7 @@
           <a:p>
             <a:fld id="{38CAE1C8-A9FA-924F-80DA-3B96C0343AF4}" type="datetime9">
               <a:rPr lang="he-IL" smtClean="0"/>
-              <a:t>10 פברואר, 2026</a:t>
+              <a:t>8 מאי, 2026</a:t>
             </a:fld>
             <a:endParaRPr lang="en-US"/>
           </a:p>
@@ -2625,6 +2825,427 @@
 </file>
 
 <file path=ppt/slideLayouts/slideLayout7.xml><?xml version="1.0" encoding="utf-8"?>
+<p:sldLayout xmlns:a="http://schemas.openxmlformats.org/drawingml/2006/main" xmlns:r="http://schemas.openxmlformats.org/officeDocument/2006/relationships" xmlns:p="http://schemas.openxmlformats.org/presentationml/2006/main" preserve="1" userDrawn="1">
+  <p:cSld name="Table">
+    <p:spTree>
+      <p:nvGrpSpPr>
+        <p:cNvPr id="1" name=""/>
+        <p:cNvGrpSpPr/>
+        <p:nvPr/>
+      </p:nvGrpSpPr>
+      <p:grpSpPr>
+        <a:xfrm>
+          <a:off x="0" y="0"/>
+          <a:ext cx="0" cy="0"/>
+          <a:chOff x="0" y="0"/>
+          <a:chExt cx="0" cy="0"/>
+        </a:xfrm>
+      </p:grpSpPr>
+      <p:sp>
+        <p:nvSpPr>
+          <p:cNvPr id="2" name="Title 1"/>
+          <p:cNvSpPr>
+            <a:spLocks noGrp="1"/>
+          </p:cNvSpPr>
+          <p:nvPr>
+            <p:ph type="title"/>
+          </p:nvPr>
+        </p:nvSpPr>
+        <p:spPr/>
+        <p:txBody>
+          <a:bodyPr/>
+          <a:lstStyle>
+            <a:lvl1pPr>
+              <a:defRPr/>
+            </a:lvl1pPr>
+          </a:lstStyle>
+          <a:p>
+            <a:r>
+              <a:rPr lang="en-US"/>
+              <a:t>Click to edit Master title style</a:t>
+            </a:r>
+          </a:p>
+        </p:txBody>
+      </p:sp>
+      <p:sp>
+        <p:nvSpPr>
+          <p:cNvPr id="7" name="Date Placeholder 6"/>
+          <p:cNvSpPr>
+            <a:spLocks noGrp="1"/>
+          </p:cNvSpPr>
+          <p:nvPr>
+            <p:ph type="dt" sz="half" idx="10"/>
+          </p:nvPr>
+        </p:nvSpPr>
+        <p:spPr/>
+        <p:txBody>
+          <a:bodyPr/>
+          <a:lstStyle/>
+          <a:p>
+            <a:fld id="{38CAE1C8-A9FA-924F-80DA-3B96C0343AF4}" type="datetime9">
+              <a:rPr lang="he-IL" smtClean="0"/>
+              <a:t>8 מאי, 2026</a:t>
+            </a:fld>
+            <a:endParaRPr lang="en-US"/>
+          </a:p>
+        </p:txBody>
+      </p:sp>
+      <p:sp>
+        <p:nvSpPr>
+          <p:cNvPr id="8" name="Footer Placeholder 7"/>
+          <p:cNvSpPr>
+            <a:spLocks noGrp="1"/>
+          </p:cNvSpPr>
+          <p:nvPr>
+            <p:ph type="ftr" sz="quarter" idx="11"/>
+          </p:nvPr>
+        </p:nvSpPr>
+        <p:spPr/>
+        <p:txBody>
+          <a:bodyPr/>
+          <a:lstStyle/>
+          <a:p>
+            <a:r>
+              <a:rPr lang="en-US"/>
+              <a:t>Or Peretz</a:t>
+            </a:r>
+          </a:p>
+        </p:txBody>
+      </p:sp>
+      <p:sp>
+        <p:nvSpPr>
+          <p:cNvPr id="9" name="Slide Number Placeholder 8"/>
+          <p:cNvSpPr>
+            <a:spLocks noGrp="1"/>
+          </p:cNvSpPr>
+          <p:nvPr>
+            <p:ph type="sldNum" sz="quarter" idx="12"/>
+          </p:nvPr>
+        </p:nvSpPr>
+        <p:spPr/>
+        <p:txBody>
+          <a:bodyPr/>
+          <a:lstStyle/>
+          <a:p>
+            <a:fld id="{C1FF6DA9-008F-8B48-92A6-B652298478BF}" type="slidenum">
+              <a:rPr lang="en-US" smtClean="0"/>
+              <a:t>‹#›</a:t>
+            </a:fld>
+            <a:endParaRPr lang="en-US"/>
+          </a:p>
+        </p:txBody>
+      </p:sp>
+      <p:graphicFrame>
+        <p:nvGraphicFramePr>
+          <p:cNvPr id="4" name="טבלה 3">
+            <a:extLst>
+              <a:ext uri="{FF2B5EF4-FFF2-40B4-BE49-F238E27FC236}">
+                <a16:creationId xmlns:a16="http://schemas.microsoft.com/office/drawing/2014/main" id="{71812306-B812-4C50-F7A0-862C984F42DB}"/>
+              </a:ext>
+            </a:extLst>
+          </p:cNvPr>
+          <p:cNvGraphicFramePr>
+            <a:graphicFrameLocks noGrp="1"/>
+          </p:cNvGraphicFramePr>
+          <p:nvPr userDrawn="1">
+            <p:extLst>
+              <p:ext uri="{D42A27DB-BD31-4B8C-83A1-F6EECF244321}">
+                <p14:modId xmlns:p14="http://schemas.microsoft.com/office/powerpoint/2010/main" val="1178729032"/>
+              </p:ext>
+            </p:extLst>
+          </p:nvPr>
+        </p:nvGraphicFramePr>
+        <p:xfrm>
+          <a:off x="4672422" y="2231471"/>
+          <a:ext cx="3600000" cy="2635803"/>
+        </p:xfrm>
+        <a:graphic>
+          <a:graphicData uri="http://schemas.openxmlformats.org/drawingml/2006/table">
+            <a:tbl>
+              <a:tblPr rtl="1" firstRow="1" bandRow="1">
+                <a:tableStyleId>{793D81CF-94F2-401A-BA57-92F5A7B2D0C5}</a:tableStyleId>
+              </a:tblPr>
+              <a:tblGrid>
+                <a:gridCol w="600000">
+                  <a:extLst>
+                    <a:ext uri="{9D8B030D-6E8A-4147-A177-3AD203B41FA5}">
+                      <a16:colId xmlns:a16="http://schemas.microsoft.com/office/drawing/2014/main" val="3224435564"/>
+                    </a:ext>
+                  </a:extLst>
+                </a:gridCol>
+                <a:gridCol w="600000">
+                  <a:extLst>
+                    <a:ext uri="{9D8B030D-6E8A-4147-A177-3AD203B41FA5}">
+                      <a16:colId xmlns:a16="http://schemas.microsoft.com/office/drawing/2014/main" val="1520824301"/>
+                    </a:ext>
+                  </a:extLst>
+                </a:gridCol>
+                <a:gridCol w="600000">
+                  <a:extLst>
+                    <a:ext uri="{9D8B030D-6E8A-4147-A177-3AD203B41FA5}">
+                      <a16:colId xmlns:a16="http://schemas.microsoft.com/office/drawing/2014/main" val="2907090588"/>
+                    </a:ext>
+                  </a:extLst>
+                </a:gridCol>
+                <a:gridCol w="600000">
+                  <a:extLst>
+                    <a:ext uri="{9D8B030D-6E8A-4147-A177-3AD203B41FA5}">
+                      <a16:colId xmlns:a16="http://schemas.microsoft.com/office/drawing/2014/main" val="2141296278"/>
+                    </a:ext>
+                  </a:extLst>
+                </a:gridCol>
+                <a:gridCol w="600000">
+                  <a:extLst>
+                    <a:ext uri="{9D8B030D-6E8A-4147-A177-3AD203B41FA5}">
+                      <a16:colId xmlns:a16="http://schemas.microsoft.com/office/drawing/2014/main" val="1831022972"/>
+                    </a:ext>
+                  </a:extLst>
+                </a:gridCol>
+                <a:gridCol w="600000">
+                  <a:extLst>
+                    <a:ext uri="{9D8B030D-6E8A-4147-A177-3AD203B41FA5}">
+                      <a16:colId xmlns:a16="http://schemas.microsoft.com/office/drawing/2014/main" val="626801781"/>
+                    </a:ext>
+                  </a:extLst>
+                </a:gridCol>
+              </a:tblGrid>
+              <a:tr h="618009">
+                <a:tc>
+                  <a:txBody>
+                    <a:bodyPr/>
+                    <a:lstStyle/>
+                    <a:p>
+                      <a:pPr marL="0" algn="ctr" defTabSz="457200" rtl="0" eaLnBrk="1" fontAlgn="ctr" latinLnBrk="0" hangingPunct="1"/>
+                      <a:endParaRPr lang="he-IL" sz="2200" dirty="0"/>
+                    </a:p>
+                  </a:txBody>
+                  <a:tcPr anchor="ctr"/>
+                </a:tc>
+                <a:tc>
+                  <a:txBody>
+                    <a:bodyPr/>
+                    <a:lstStyle/>
+                    <a:p>
+                      <a:pPr marL="0" algn="ctr" defTabSz="457200" rtl="0" eaLnBrk="1" fontAlgn="ctr" latinLnBrk="0" hangingPunct="1"/>
+                      <a:endParaRPr lang="he-IL" sz="2200" dirty="0"/>
+                    </a:p>
+                  </a:txBody>
+                  <a:tcPr anchor="ctr"/>
+                </a:tc>
+                <a:tc>
+                  <a:txBody>
+                    <a:bodyPr/>
+                    <a:lstStyle/>
+                    <a:p>
+                      <a:pPr algn="ctr" rtl="1" fontAlgn="ctr"/>
+                      <a:endParaRPr lang="he-IL" sz="2200"/>
+                    </a:p>
+                  </a:txBody>
+                  <a:tcPr anchor="ctr"/>
+                </a:tc>
+                <a:tc>
+                  <a:txBody>
+                    <a:bodyPr/>
+                    <a:lstStyle/>
+                    <a:p>
+                      <a:pPr algn="ctr" rtl="1" fontAlgn="ctr"/>
+                      <a:endParaRPr lang="he-IL" sz="2200" dirty="0"/>
+                    </a:p>
+                  </a:txBody>
+                  <a:tcPr anchor="ctr"/>
+                </a:tc>
+                <a:tc>
+                  <a:txBody>
+                    <a:bodyPr/>
+                    <a:lstStyle/>
+                    <a:p>
+                      <a:pPr marL="0" algn="ctr" defTabSz="457200" rtl="0" eaLnBrk="1" fontAlgn="ctr" latinLnBrk="0" hangingPunct="1"/>
+                      <a:endParaRPr lang="he-IL" sz="2200" dirty="0"/>
+                    </a:p>
+                  </a:txBody>
+                  <a:tcPr anchor="ctr"/>
+                </a:tc>
+                <a:tc>
+                  <a:txBody>
+                    <a:bodyPr/>
+                    <a:lstStyle/>
+                    <a:p>
+                      <a:pPr marL="0" algn="ctr" defTabSz="457200" rtl="0" eaLnBrk="1" fontAlgn="ctr" latinLnBrk="0" hangingPunct="1"/>
+                      <a:endParaRPr lang="he-IL" sz="2200" dirty="0"/>
+                    </a:p>
+                  </a:txBody>
+                  <a:tcPr anchor="ctr"/>
+                </a:tc>
+                <a:extLst>
+                  <a:ext uri="{0D108BD9-81ED-4DB2-BD59-A6C34878D82A}">
+                    <a16:rowId xmlns:a16="http://schemas.microsoft.com/office/drawing/2014/main" val="924863574"/>
+                  </a:ext>
+                </a:extLst>
+              </a:tr>
+              <a:tr h="1008897">
+                <a:tc>
+                  <a:txBody>
+                    <a:bodyPr/>
+                    <a:lstStyle/>
+                    <a:p>
+                      <a:pPr algn="ctr" rtl="1" fontAlgn="ctr"/>
+                      <a:endParaRPr lang="he-IL" sz="2200"/>
+                    </a:p>
+                  </a:txBody>
+                  <a:tcPr anchor="ctr"/>
+                </a:tc>
+                <a:tc>
+                  <a:txBody>
+                    <a:bodyPr/>
+                    <a:lstStyle/>
+                    <a:p>
+                      <a:pPr algn="ctr" rtl="1" fontAlgn="ctr"/>
+                      <a:endParaRPr lang="he-IL" sz="2200" dirty="0"/>
+                    </a:p>
+                  </a:txBody>
+                  <a:tcPr anchor="ctr"/>
+                </a:tc>
+                <a:tc>
+                  <a:txBody>
+                    <a:bodyPr/>
+                    <a:lstStyle/>
+                    <a:p>
+                      <a:pPr marL="0" algn="ctr" defTabSz="457200" rtl="0" eaLnBrk="1" fontAlgn="ctr" latinLnBrk="0" hangingPunct="1"/>
+                      <a:endParaRPr lang="he-IL" sz="2200" dirty="0"/>
+                    </a:p>
+                  </a:txBody>
+                  <a:tcPr anchor="ctr"/>
+                </a:tc>
+                <a:tc>
+                  <a:txBody>
+                    <a:bodyPr/>
+                    <a:lstStyle/>
+                    <a:p>
+                      <a:pPr algn="ctr" rtl="1" fontAlgn="ctr"/>
+                      <a:endParaRPr lang="he-IL" sz="2200"/>
+                    </a:p>
+                  </a:txBody>
+                  <a:tcPr anchor="ctr"/>
+                </a:tc>
+                <a:tc>
+                  <a:txBody>
+                    <a:bodyPr/>
+                    <a:lstStyle/>
+                    <a:p>
+                      <a:pPr marL="0" algn="ctr" defTabSz="457200" rtl="0" eaLnBrk="1" fontAlgn="ctr" latinLnBrk="0" hangingPunct="1"/>
+                      <a:endParaRPr lang="he-IL" sz="2200" dirty="0"/>
+                    </a:p>
+                  </a:txBody>
+                  <a:tcPr anchor="ctr"/>
+                </a:tc>
+                <a:tc>
+                  <a:txBody>
+                    <a:bodyPr/>
+                    <a:lstStyle/>
+                    <a:p>
+                      <a:pPr marL="0" algn="ctr" defTabSz="457200" rtl="0" eaLnBrk="1" fontAlgn="ctr" latinLnBrk="0" hangingPunct="1"/>
+                      <a:endParaRPr lang="he-IL" sz="2200" dirty="0"/>
+                    </a:p>
+                  </a:txBody>
+                  <a:tcPr anchor="ctr"/>
+                </a:tc>
+                <a:extLst>
+                  <a:ext uri="{0D108BD9-81ED-4DB2-BD59-A6C34878D82A}">
+                    <a16:rowId xmlns:a16="http://schemas.microsoft.com/office/drawing/2014/main" val="3680625601"/>
+                  </a:ext>
+                </a:extLst>
+              </a:tr>
+              <a:tr h="1008897">
+                <a:tc>
+                  <a:txBody>
+                    <a:bodyPr/>
+                    <a:lstStyle/>
+                    <a:p>
+                      <a:pPr algn="ctr" rtl="1" fontAlgn="ctr"/>
+                      <a:endParaRPr lang="he-IL" sz="2200"/>
+                    </a:p>
+                  </a:txBody>
+                  <a:tcPr anchor="ctr"/>
+                </a:tc>
+                <a:tc>
+                  <a:txBody>
+                    <a:bodyPr/>
+                    <a:lstStyle/>
+                    <a:p>
+                      <a:pPr algn="ctr" rtl="1" fontAlgn="ctr"/>
+                      <a:endParaRPr lang="he-IL" sz="2200" dirty="0"/>
+                    </a:p>
+                  </a:txBody>
+                  <a:tcPr anchor="ctr"/>
+                </a:tc>
+                <a:tc>
+                  <a:txBody>
+                    <a:bodyPr/>
+                    <a:lstStyle/>
+                    <a:p>
+                      <a:pPr algn="ctr" rtl="1" fontAlgn="ctr"/>
+                      <a:endParaRPr lang="he-IL" sz="2200" dirty="0"/>
+                    </a:p>
+                  </a:txBody>
+                  <a:tcPr anchor="ctr"/>
+                </a:tc>
+                <a:tc>
+                  <a:txBody>
+                    <a:bodyPr/>
+                    <a:lstStyle/>
+                    <a:p>
+                      <a:pPr algn="ctr" rtl="1" fontAlgn="ctr"/>
+                      <a:endParaRPr lang="he-IL" sz="2200" dirty="0"/>
+                    </a:p>
+                  </a:txBody>
+                  <a:tcPr anchor="ctr"/>
+                </a:tc>
+                <a:tc>
+                  <a:txBody>
+                    <a:bodyPr/>
+                    <a:lstStyle/>
+                    <a:p>
+                      <a:pPr algn="ctr" rtl="1" fontAlgn="ctr"/>
+                      <a:endParaRPr lang="he-IL" sz="2200" dirty="0"/>
+                    </a:p>
+                  </a:txBody>
+                  <a:tcPr anchor="ctr"/>
+                </a:tc>
+                <a:tc>
+                  <a:txBody>
+                    <a:bodyPr/>
+                    <a:lstStyle/>
+                    <a:p>
+                      <a:pPr marL="0" algn="ctr" defTabSz="457200" rtl="0" eaLnBrk="1" fontAlgn="ctr" latinLnBrk="0" hangingPunct="1"/>
+                      <a:endParaRPr lang="he-IL" sz="2200" dirty="0"/>
+                    </a:p>
+                  </a:txBody>
+                  <a:tcPr anchor="ctr"/>
+                </a:tc>
+                <a:extLst>
+                  <a:ext uri="{0D108BD9-81ED-4DB2-BD59-A6C34878D82A}">
+                    <a16:rowId xmlns:a16="http://schemas.microsoft.com/office/drawing/2014/main" val="4067572525"/>
+                  </a:ext>
+                </a:extLst>
+              </a:tr>
+            </a:tbl>
+          </a:graphicData>
+        </a:graphic>
+      </p:graphicFrame>
+    </p:spTree>
+    <p:extLst>
+      <p:ext uri="{BB962C8B-B14F-4D97-AF65-F5344CB8AC3E}">
+        <p14:creationId xmlns:p14="http://schemas.microsoft.com/office/powerpoint/2010/main" val="2382468925"/>
+      </p:ext>
+    </p:extLst>
+  </p:cSld>
+  <p:clrMapOvr>
+    <a:masterClrMapping/>
+  </p:clrMapOvr>
+</p:sldLayout>
+</file>
+
+<file path=ppt/slideLayouts/slideLayout8.xml><?xml version="1.0" encoding="utf-8"?>
 <p:sldLayout xmlns:a="http://schemas.openxmlformats.org/drawingml/2006/main" xmlns:r="http://schemas.openxmlformats.org/officeDocument/2006/relationships" xmlns:p="http://schemas.openxmlformats.org/presentationml/2006/main" preserve="1" userDrawn="1">
   <p:cSld name="Title Only">
     <p:spTree>
@@ -2680,7 +3301,7 @@
           <a:p>
             <a:fld id="{3DC92AE4-510D-3C40-B9B0-AA6693EED883}" type="datetime9">
               <a:rPr lang="he-IL" smtClean="0"/>
-              <a:t>10 פברואר, 2026</a:t>
+              <a:t>8 מאי, 2026</a:t>
             </a:fld>
             <a:endParaRPr lang="en-US"/>
           </a:p>
@@ -2824,7 +3445,7 @@
 </p:sldLayout>
 </file>
 
-<file path=ppt/slideLayouts/slideLayout8.xml><?xml version="1.0" encoding="utf-8"?>
+<file path=ppt/slideLayouts/slideLayout9.xml><?xml version="1.0" encoding="utf-8"?>
 <p:sldLayout xmlns:a="http://schemas.openxmlformats.org/drawingml/2006/main" xmlns:r="http://schemas.openxmlformats.org/officeDocument/2006/relationships" xmlns:p="http://schemas.openxmlformats.org/presentationml/2006/main" preserve="1" userDrawn="1">
   <p:cSld name="Blank">
     <p:spTree>
@@ -2858,7 +3479,7 @@
           <a:p>
             <a:fld id="{E2C5D179-4B48-7641-AFA1-4656153FFCB8}" type="datetime9">
               <a:rPr lang="he-IL" smtClean="0"/>
-              <a:t>10 פברואר, 2026</a:t>
+              <a:t>8 מאי, 2026</a:t>
             </a:fld>
             <a:endParaRPr lang="en-US"/>
           </a:p>
@@ -2989,110 +3610,12 @@
           </a:p>
         </p:txBody>
       </p:sp>
-    </p:spTree>
-    <p:extLst>
-      <p:ext uri="{BB962C8B-B14F-4D97-AF65-F5344CB8AC3E}">
-        <p14:creationId xmlns:p14="http://schemas.microsoft.com/office/powerpoint/2010/main" val="1212999818"/>
-      </p:ext>
-    </p:extLst>
-  </p:cSld>
-  <p:clrMapOvr>
-    <a:masterClrMapping/>
-  </p:clrMapOvr>
-</p:sldLayout>
-</file>
-
-<file path=ppt/slideLayouts/slideLayout9.xml><?xml version="1.0" encoding="utf-8"?>
-<p:sldLayout xmlns:a="http://schemas.openxmlformats.org/drawingml/2006/main" xmlns:r="http://schemas.openxmlformats.org/officeDocument/2006/relationships" xmlns:p="http://schemas.openxmlformats.org/presentationml/2006/main" preserve="1" userDrawn="1">
-  <p:cSld name="Content with Caption">
-    <p:spTree>
-      <p:nvGrpSpPr>
-        <p:cNvPr id="1" name=""/>
-        <p:cNvGrpSpPr/>
-        <p:nvPr/>
-      </p:nvGrpSpPr>
-      <p:grpSpPr>
-        <a:xfrm>
-          <a:off x="0" y="0"/>
-          <a:ext cx="0" cy="0"/>
-          <a:chOff x="0" y="0"/>
-          <a:chExt cx="0" cy="0"/>
-        </a:xfrm>
-      </p:grpSpPr>
-      <p:sp>
-        <p:nvSpPr>
-          <p:cNvPr id="5" name="Date Placeholder 4"/>
-          <p:cNvSpPr>
-            <a:spLocks noGrp="1"/>
-          </p:cNvSpPr>
-          <p:nvPr>
-            <p:ph type="dt" sz="half" idx="10"/>
-          </p:nvPr>
-        </p:nvSpPr>
-        <p:spPr/>
-        <p:txBody>
-          <a:bodyPr/>
-          <a:lstStyle/>
-          <a:p>
-            <a:fld id="{B2D96A8D-C7E4-194A-BF0A-D552B24EBF94}" type="datetime9">
-              <a:rPr lang="he-IL" smtClean="0"/>
-              <a:t>10 פברואר, 2026</a:t>
-            </a:fld>
-            <a:endParaRPr lang="en-US"/>
-          </a:p>
-        </p:txBody>
-      </p:sp>
-      <p:sp>
-        <p:nvSpPr>
-          <p:cNvPr id="6" name="Footer Placeholder 5"/>
-          <p:cNvSpPr>
-            <a:spLocks noGrp="1"/>
-          </p:cNvSpPr>
-          <p:nvPr>
-            <p:ph type="ftr" sz="quarter" idx="11"/>
-          </p:nvPr>
-        </p:nvSpPr>
-        <p:spPr/>
-        <p:txBody>
-          <a:bodyPr/>
-          <a:lstStyle/>
-          <a:p>
-            <a:r>
-              <a:rPr lang="en-US"/>
-              <a:t>Or Peretz</a:t>
-            </a:r>
-          </a:p>
-        </p:txBody>
-      </p:sp>
-      <p:sp>
-        <p:nvSpPr>
-          <p:cNvPr id="7" name="Slide Number Placeholder 6"/>
-          <p:cNvSpPr>
-            <a:spLocks noGrp="1"/>
-          </p:cNvSpPr>
-          <p:nvPr>
-            <p:ph type="sldNum" sz="quarter" idx="12"/>
-          </p:nvPr>
-        </p:nvSpPr>
-        <p:spPr/>
-        <p:txBody>
-          <a:bodyPr/>
-          <a:lstStyle/>
-          <a:p>
-            <a:fld id="{C1FF6DA9-008F-8B48-92A6-B652298478BF}" type="slidenum">
-              <a:rPr lang="en-US" smtClean="0"/>
-              <a:t>‹#›</a:t>
-            </a:fld>
-            <a:endParaRPr lang="en-US"/>
-          </a:p>
-        </p:txBody>
-      </p:sp>
-      <p:sp>
-        <p:nvSpPr>
-          <p:cNvPr id="9" name="Title 1">
+      <p:sp>
+        <p:nvSpPr>
+          <p:cNvPr id="6" name="Title 1">
             <a:extLst>
               <a:ext uri="{FF2B5EF4-FFF2-40B4-BE49-F238E27FC236}">
-                <a16:creationId xmlns:a16="http://schemas.microsoft.com/office/drawing/2014/main" id="{7F24627C-5938-5D06-969C-341161F72C9C}"/>
+                <a16:creationId xmlns:a16="http://schemas.microsoft.com/office/drawing/2014/main" id="{C5291BFA-5674-76B5-89A7-703C972290C8}"/>
               </a:ext>
             </a:extLst>
           </p:cNvPr>
@@ -3120,161 +3643,10 @@
           </a:p>
         </p:txBody>
       </p:sp>
-      <p:sp>
-        <p:nvSpPr>
-          <p:cNvPr id="2" name="Content Placeholder 2">
-            <a:extLst>
-              <a:ext uri="{FF2B5EF4-FFF2-40B4-BE49-F238E27FC236}">
-                <a16:creationId xmlns:a16="http://schemas.microsoft.com/office/drawing/2014/main" id="{63E56AFE-36F7-8DA5-652B-89A25DA319A7}"/>
-              </a:ext>
-            </a:extLst>
-          </p:cNvPr>
-          <p:cNvSpPr>
-            <a:spLocks noGrp="1"/>
-          </p:cNvSpPr>
-          <p:nvPr>
-            <p:ph idx="1" hasCustomPrompt="1"/>
-          </p:nvPr>
-        </p:nvSpPr>
-        <p:spPr>
-          <a:xfrm>
-            <a:off x="3957403" y="1417638"/>
-            <a:ext cx="7624997" cy="4357028"/>
-          </a:xfrm>
-        </p:spPr>
-        <p:txBody>
-          <a:bodyPr>
-            <a:normAutofit/>
-          </a:bodyPr>
-          <a:lstStyle>
-            <a:lvl1pPr>
-              <a:defRPr sz="2800"/>
-            </a:lvl1pPr>
-            <a:lvl2pPr>
-              <a:defRPr sz="2400"/>
-            </a:lvl2pPr>
-            <a:lvl3pPr>
-              <a:defRPr sz="2000"/>
-            </a:lvl3pPr>
-            <a:lvl4pPr>
-              <a:defRPr sz="1800"/>
-            </a:lvl4pPr>
-            <a:lvl5pPr>
-              <a:defRPr sz="1800"/>
-            </a:lvl5pPr>
-          </a:lstStyle>
-          <a:p>
-            <a:pPr lvl="0"/>
-            <a:r>
-              <a:rPr lang="en-US" dirty="0"/>
-              <a:t>Click to edit Master text styles</a:t>
-            </a:r>
-          </a:p>
-          <a:p>
-            <a:pPr lvl="1"/>
-            <a:r>
-              <a:rPr lang="en-US" dirty="0"/>
-              <a:t>Second level</a:t>
-            </a:r>
-          </a:p>
-          <a:p>
-            <a:pPr lvl="2"/>
-            <a:r>
-              <a:rPr lang="en-US" dirty="0"/>
-              <a:t>Third level</a:t>
-            </a:r>
-          </a:p>
-          <a:p>
-            <a:pPr lvl="3"/>
-            <a:r>
-              <a:rPr lang="en-US" dirty="0"/>
-              <a:t>Fourth level</a:t>
-            </a:r>
-          </a:p>
-          <a:p>
-            <a:pPr lvl="4"/>
-            <a:r>
-              <a:rPr lang="en-US" dirty="0"/>
-              <a:t>Fifth level</a:t>
-            </a:r>
-          </a:p>
-        </p:txBody>
-      </p:sp>
-      <p:sp>
-        <p:nvSpPr>
-          <p:cNvPr id="3" name="Text Placeholder 3">
-            <a:extLst>
-              <a:ext uri="{FF2B5EF4-FFF2-40B4-BE49-F238E27FC236}">
-                <a16:creationId xmlns:a16="http://schemas.microsoft.com/office/drawing/2014/main" id="{838FFFFD-68E9-C4E4-7764-523BAE32B83B}"/>
-              </a:ext>
-            </a:extLst>
-          </p:cNvPr>
-          <p:cNvSpPr>
-            <a:spLocks noGrp="1"/>
-          </p:cNvSpPr>
-          <p:nvPr>
-            <p:ph type="body" sz="half" idx="2" hasCustomPrompt="1"/>
-          </p:nvPr>
-        </p:nvSpPr>
-        <p:spPr>
-          <a:xfrm>
-            <a:off x="965200" y="1417638"/>
-            <a:ext cx="2844801" cy="4357028"/>
-          </a:xfrm>
-        </p:spPr>
-        <p:txBody>
-          <a:bodyPr/>
-          <a:lstStyle>
-            <a:lvl1pPr marL="0" indent="0">
-              <a:buNone/>
-              <a:defRPr sz="2200"/>
-            </a:lvl1pPr>
-            <a:lvl2pPr marL="457200" indent="0">
-              <a:buNone/>
-              <a:defRPr sz="1200"/>
-            </a:lvl2pPr>
-            <a:lvl3pPr marL="914400" indent="0">
-              <a:buNone/>
-              <a:defRPr sz="1000"/>
-            </a:lvl3pPr>
-            <a:lvl4pPr marL="1371600" indent="0">
-              <a:buNone/>
-              <a:defRPr sz="900"/>
-            </a:lvl4pPr>
-            <a:lvl5pPr marL="1828800" indent="0">
-              <a:buNone/>
-              <a:defRPr sz="900"/>
-            </a:lvl5pPr>
-            <a:lvl6pPr marL="2286000" indent="0">
-              <a:buNone/>
-              <a:defRPr sz="900"/>
-            </a:lvl6pPr>
-            <a:lvl7pPr marL="2743200" indent="0">
-              <a:buNone/>
-              <a:defRPr sz="900"/>
-            </a:lvl7pPr>
-            <a:lvl8pPr marL="3200400" indent="0">
-              <a:buNone/>
-              <a:defRPr sz="900"/>
-            </a:lvl8pPr>
-            <a:lvl9pPr marL="3657600" indent="0">
-              <a:buNone/>
-              <a:defRPr sz="900"/>
-            </a:lvl9pPr>
-          </a:lstStyle>
-          <a:p>
-            <a:pPr lvl="0"/>
-            <a:r>
-              <a:rPr lang="en-US" dirty="0"/>
-              <a:t>Click to edit Master text styles</a:t>
-            </a:r>
-          </a:p>
-        </p:txBody>
-      </p:sp>
     </p:spTree>
     <p:extLst>
       <p:ext uri="{BB962C8B-B14F-4D97-AF65-F5344CB8AC3E}">
-        <p14:creationId xmlns:p14="http://schemas.microsoft.com/office/powerpoint/2010/main" val="1840726560"/>
+        <p14:creationId xmlns:p14="http://schemas.microsoft.com/office/powerpoint/2010/main" val="1212999818"/>
       </p:ext>
     </p:extLst>
   </p:cSld>
@@ -3550,7 +3922,7 @@
           <a:p>
             <a:fld id="{3AA9E24A-D52C-CB4E-85D6-C52415601A2A}" type="datetime9">
               <a:rPr lang="he-IL" smtClean="0"/>
-              <a:t>10 פברואר, 2026</a:t>
+              <a:t>8 מאי, 2026</a:t>
             </a:fld>
             <a:endParaRPr lang="en-US"/>
           </a:p>
@@ -3802,12 +4174,13 @@
     <p:sldLayoutId id="2147483652" r:id="rId4"/>
     <p:sldLayoutId id="2147483660" r:id="rId5"/>
     <p:sldLayoutId id="2147483653" r:id="rId6"/>
-    <p:sldLayoutId id="2147483654" r:id="rId7"/>
-    <p:sldLayoutId id="2147483655" r:id="rId8"/>
-    <p:sldLayoutId id="2147483656" r:id="rId9"/>
-    <p:sldLayoutId id="2147483657" r:id="rId10"/>
-    <p:sldLayoutId id="2147483658" r:id="rId11"/>
-    <p:sldLayoutId id="2147483659" r:id="rId12"/>
+    <p:sldLayoutId id="2147483661" r:id="rId7"/>
+    <p:sldLayoutId id="2147483654" r:id="rId8"/>
+    <p:sldLayoutId id="2147483655" r:id="rId9"/>
+    <p:sldLayoutId id="2147483656" r:id="rId10"/>
+    <p:sldLayoutId id="2147483657" r:id="rId11"/>
+    <p:sldLayoutId id="2147483658" r:id="rId12"/>
+    <p:sldLayoutId id="2147483659" r:id="rId13"/>
   </p:sldLayoutIdLst>
   <p:hf hdr="0" dt="0"/>
   <p:txStyles>
@@ -4241,10 +4614,15 @@
             <a:spLocks noGrp="1"/>
           </p:cNvSpPr>
           <p:nvPr>
-            <p:ph idx="1"/>
-          </p:nvPr>
-        </p:nvSpPr>
-        <p:spPr/>
+            <p:ph idx="4294967295"/>
+          </p:nvPr>
+        </p:nvSpPr>
+        <p:spPr>
+          <a:xfrm>
+            <a:off x="946768" y="1600201"/>
+            <a:ext cx="10635632" cy="4525963"/>
+          </a:xfrm>
+        </p:spPr>
         <p:txBody>
           <a:bodyPr/>
           <a:lstStyle/>
@@ -4380,10 +4758,15 @@
             <a:spLocks noGrp="1"/>
           </p:cNvSpPr>
           <p:nvPr>
-            <p:ph sz="half" idx="2"/>
-          </p:nvPr>
-        </p:nvSpPr>
-        <p:spPr/>
+            <p:ph sz="half" idx="4294967295"/>
+          </p:nvPr>
+        </p:nvSpPr>
+        <p:spPr>
+          <a:xfrm>
+            <a:off x="5717894" y="2569580"/>
+            <a:ext cx="5864506" cy="3556584"/>
+          </a:xfrm>
+        </p:spPr>
         <p:txBody>
           <a:bodyPr/>
           <a:lstStyle/>
@@ -4909,10 +5292,15 @@
             <a:spLocks noGrp="1"/>
           </p:cNvSpPr>
           <p:nvPr>
-            <p:ph idx="1"/>
-          </p:nvPr>
-        </p:nvSpPr>
-        <p:spPr/>
+            <p:ph idx="4294967295"/>
+          </p:nvPr>
+        </p:nvSpPr>
+        <p:spPr>
+          <a:xfrm>
+            <a:off x="946768" y="1600201"/>
+            <a:ext cx="10635632" cy="4525963"/>
+          </a:xfrm>
+        </p:spPr>
         <p:txBody>
           <a:bodyPr/>
           <a:lstStyle/>
@@ -4979,6 +5367,255 @@
         </p:txBody>
       </p:sp>
     </p:spTree>
+  </p:cSld>
+  <p:clrMapOvr>
+    <a:masterClrMapping/>
+  </p:clrMapOvr>
+</p:sld>
+</file>
+
+<file path=ppt/slides/slide8.xml><?xml version="1.0" encoding="utf-8"?>
+<p:sld xmlns:a="http://schemas.openxmlformats.org/drawingml/2006/main" xmlns:r="http://schemas.openxmlformats.org/officeDocument/2006/relationships" xmlns:p="http://schemas.openxmlformats.org/presentationml/2006/main">
+  <p:cSld>
+    <p:spTree>
+      <p:nvGrpSpPr>
+        <p:cNvPr id="1" name=""/>
+        <p:cNvGrpSpPr/>
+        <p:nvPr/>
+      </p:nvGrpSpPr>
+      <p:grpSpPr>
+        <a:xfrm>
+          <a:off x="0" y="0"/>
+          <a:ext cx="0" cy="0"/>
+          <a:chOff x="0" y="0"/>
+          <a:chExt cx="0" cy="0"/>
+        </a:xfrm>
+      </p:grpSpPr>
+      <p:sp>
+        <p:nvSpPr>
+          <p:cNvPr id="6" name="כותרת 5">
+            <a:extLst>
+              <a:ext uri="{FF2B5EF4-FFF2-40B4-BE49-F238E27FC236}">
+                <a16:creationId xmlns:a16="http://schemas.microsoft.com/office/drawing/2014/main" id="{8896758C-D79E-2387-EA5A-C4E165BAED5D}"/>
+              </a:ext>
+            </a:extLst>
+          </p:cNvPr>
+          <p:cNvSpPr>
+            <a:spLocks noGrp="1"/>
+          </p:cNvSpPr>
+          <p:nvPr>
+            <p:ph type="title"/>
+          </p:nvPr>
+        </p:nvSpPr>
+        <p:spPr/>
+        <p:txBody>
+          <a:bodyPr/>
+          <a:lstStyle/>
+          <a:p>
+            <a:endParaRPr lang="he-IL"/>
+          </a:p>
+        </p:txBody>
+      </p:sp>
+      <p:sp>
+        <p:nvSpPr>
+          <p:cNvPr id="4" name="מציין מיקום של כותרת תחתונה 3">
+            <a:extLst>
+              <a:ext uri="{FF2B5EF4-FFF2-40B4-BE49-F238E27FC236}">
+                <a16:creationId xmlns:a16="http://schemas.microsoft.com/office/drawing/2014/main" id="{32C43410-120F-DE4A-379F-CD7C611653A6}"/>
+              </a:ext>
+            </a:extLst>
+          </p:cNvPr>
+          <p:cNvSpPr>
+            <a:spLocks noGrp="1"/>
+          </p:cNvSpPr>
+          <p:nvPr>
+            <p:ph type="ftr" sz="quarter" idx="11"/>
+          </p:nvPr>
+        </p:nvSpPr>
+        <p:spPr/>
+        <p:txBody>
+          <a:bodyPr/>
+          <a:lstStyle/>
+          <a:p>
+            <a:r>
+              <a:rPr lang="en-US"/>
+              <a:t>Or Peretz</a:t>
+            </a:r>
+          </a:p>
+        </p:txBody>
+      </p:sp>
+      <p:sp>
+        <p:nvSpPr>
+          <p:cNvPr id="5" name="מציין מיקום של מספר שקופית 4">
+            <a:extLst>
+              <a:ext uri="{FF2B5EF4-FFF2-40B4-BE49-F238E27FC236}">
+                <a16:creationId xmlns:a16="http://schemas.microsoft.com/office/drawing/2014/main" id="{EA6D13E3-A355-AF99-905E-BED63EE055DB}"/>
+              </a:ext>
+            </a:extLst>
+          </p:cNvPr>
+          <p:cNvSpPr>
+            <a:spLocks noGrp="1"/>
+          </p:cNvSpPr>
+          <p:nvPr>
+            <p:ph type="sldNum" sz="quarter" idx="12"/>
+          </p:nvPr>
+        </p:nvSpPr>
+        <p:spPr/>
+        <p:txBody>
+          <a:bodyPr/>
+          <a:lstStyle/>
+          <a:p>
+            <a:fld id="{C1FF6DA9-008F-8B48-92A6-B652298478BF}" type="slidenum">
+              <a:rPr lang="en-US" smtClean="0"/>
+              <a:t>8</a:t>
+            </a:fld>
+            <a:endParaRPr lang="en-US"/>
+          </a:p>
+        </p:txBody>
+      </p:sp>
+    </p:spTree>
+    <p:extLst>
+      <p:ext uri="{BB962C8B-B14F-4D97-AF65-F5344CB8AC3E}">
+        <p14:creationId xmlns:p14="http://schemas.microsoft.com/office/powerpoint/2010/main" val="4014051409"/>
+      </p:ext>
+    </p:extLst>
+  </p:cSld>
+  <p:clrMapOvr>
+    <a:masterClrMapping/>
+  </p:clrMapOvr>
+</p:sld>
+</file>
+
+<file path=ppt/slides/slide9.xml><?xml version="1.0" encoding="utf-8"?>
+<p:sld xmlns:a="http://schemas.openxmlformats.org/drawingml/2006/main" xmlns:r="http://schemas.openxmlformats.org/officeDocument/2006/relationships" xmlns:p="http://schemas.openxmlformats.org/presentationml/2006/main">
+  <p:cSld>
+    <p:spTree>
+      <p:nvGrpSpPr>
+        <p:cNvPr id="1" name=""/>
+        <p:cNvGrpSpPr/>
+        <p:nvPr/>
+      </p:nvGrpSpPr>
+      <p:grpSpPr>
+        <a:xfrm>
+          <a:off x="0" y="0"/>
+          <a:ext cx="0" cy="0"/>
+          <a:chOff x="0" y="0"/>
+          <a:chExt cx="0" cy="0"/>
+        </a:xfrm>
+      </p:grpSpPr>
+      <p:sp>
+        <p:nvSpPr>
+          <p:cNvPr id="5" name="כותרת 4">
+            <a:extLst>
+              <a:ext uri="{FF2B5EF4-FFF2-40B4-BE49-F238E27FC236}">
+                <a16:creationId xmlns:a16="http://schemas.microsoft.com/office/drawing/2014/main" id="{9A5D6AD1-8CA7-C681-9CC2-809C7202A6B1}"/>
+              </a:ext>
+            </a:extLst>
+          </p:cNvPr>
+          <p:cNvSpPr>
+            <a:spLocks noGrp="1"/>
+          </p:cNvSpPr>
+          <p:nvPr>
+            <p:ph type="title"/>
+          </p:nvPr>
+        </p:nvSpPr>
+        <p:spPr/>
+        <p:txBody>
+          <a:bodyPr/>
+          <a:lstStyle/>
+          <a:p>
+            <a:endParaRPr lang="he-IL"/>
+          </a:p>
+        </p:txBody>
+      </p:sp>
+      <p:sp>
+        <p:nvSpPr>
+          <p:cNvPr id="3" name="מציין מיקום של כותרת תחתונה 2">
+            <a:extLst>
+              <a:ext uri="{FF2B5EF4-FFF2-40B4-BE49-F238E27FC236}">
+                <a16:creationId xmlns:a16="http://schemas.microsoft.com/office/drawing/2014/main" id="{4FFB4159-AD1A-4709-42E0-20C9B8468390}"/>
+              </a:ext>
+            </a:extLst>
+          </p:cNvPr>
+          <p:cNvSpPr>
+            <a:spLocks noGrp="1"/>
+          </p:cNvSpPr>
+          <p:nvPr>
+            <p:ph type="ftr" sz="quarter" idx="11"/>
+          </p:nvPr>
+        </p:nvSpPr>
+        <p:spPr/>
+        <p:txBody>
+          <a:bodyPr/>
+          <a:lstStyle/>
+          <a:p>
+            <a:r>
+              <a:rPr lang="en-US"/>
+              <a:t>Or Peretz</a:t>
+            </a:r>
+          </a:p>
+        </p:txBody>
+      </p:sp>
+      <p:sp>
+        <p:nvSpPr>
+          <p:cNvPr id="4" name="מציין מיקום של מספר שקופית 3">
+            <a:extLst>
+              <a:ext uri="{FF2B5EF4-FFF2-40B4-BE49-F238E27FC236}">
+                <a16:creationId xmlns:a16="http://schemas.microsoft.com/office/drawing/2014/main" id="{1B9FC3E3-39BF-D073-3FA8-0E28A5C9BE82}"/>
+              </a:ext>
+            </a:extLst>
+          </p:cNvPr>
+          <p:cNvSpPr>
+            <a:spLocks noGrp="1"/>
+          </p:cNvSpPr>
+          <p:nvPr>
+            <p:ph type="sldNum" sz="quarter" idx="12"/>
+          </p:nvPr>
+        </p:nvSpPr>
+        <p:spPr/>
+        <p:txBody>
+          <a:bodyPr/>
+          <a:lstStyle/>
+          <a:p>
+            <a:fld id="{C1FF6DA9-008F-8B48-92A6-B652298478BF}" type="slidenum">
+              <a:rPr lang="en-US" smtClean="0"/>
+              <a:t>9</a:t>
+            </a:fld>
+            <a:endParaRPr lang="en-US"/>
+          </a:p>
+        </p:txBody>
+      </p:sp>
+      <p:sp>
+        <p:nvSpPr>
+          <p:cNvPr id="6" name="מציין מיקום תוכן 5">
+            <a:extLst>
+              <a:ext uri="{FF2B5EF4-FFF2-40B4-BE49-F238E27FC236}">
+                <a16:creationId xmlns:a16="http://schemas.microsoft.com/office/drawing/2014/main" id="{86E57666-F356-1AEC-3C40-640645AC02C4}"/>
+              </a:ext>
+            </a:extLst>
+          </p:cNvPr>
+          <p:cNvSpPr>
+            <a:spLocks noGrp="1"/>
+          </p:cNvSpPr>
+          <p:nvPr>
+            <p:ph idx="1"/>
+          </p:nvPr>
+        </p:nvSpPr>
+        <p:spPr/>
+        <p:txBody>
+          <a:bodyPr/>
+          <a:lstStyle/>
+          <a:p>
+            <a:endParaRPr lang="he-IL"/>
+          </a:p>
+        </p:txBody>
+      </p:sp>
+    </p:spTree>
+    <p:extLst>
+      <p:ext uri="{BB962C8B-B14F-4D97-AF65-F5344CB8AC3E}">
+        <p14:creationId xmlns:p14="http://schemas.microsoft.com/office/powerpoint/2010/main" val="2704471321"/>
+      </p:ext>
+    </p:extLst>
   </p:cSld>
   <p:clrMapOvr>
     <a:masterClrMapping/>
